--- a/2026/agentic work.pptx
+++ b/2026/agentic work.pptx
@@ -5,23 +5,39 @@
     <p:sldMasterId id="2147483648" r:id="rId1"/>
   </p:sldMasterIdLst>
   <p:notesMasterIdLst>
-    <p:notesMasterId r:id="rId16"/>
+    <p:notesMasterId r:id="rId32"/>
   </p:notesMasterIdLst>
   <p:sldIdLst>
     <p:sldId id="256" r:id="rId2"/>
     <p:sldId id="258" r:id="rId3"/>
     <p:sldId id="257" r:id="rId4"/>
-    <p:sldId id="259" r:id="rId5"/>
-    <p:sldId id="260" r:id="rId6"/>
-    <p:sldId id="261" r:id="rId7"/>
-    <p:sldId id="263" r:id="rId8"/>
-    <p:sldId id="262" r:id="rId9"/>
-    <p:sldId id="265" r:id="rId10"/>
-    <p:sldId id="266" r:id="rId11"/>
-    <p:sldId id="267" r:id="rId12"/>
-    <p:sldId id="268" r:id="rId13"/>
-    <p:sldId id="269" r:id="rId14"/>
-    <p:sldId id="264" r:id="rId15"/>
+    <p:sldId id="284" r:id="rId5"/>
+    <p:sldId id="285" r:id="rId6"/>
+    <p:sldId id="283" r:id="rId7"/>
+    <p:sldId id="271" r:id="rId8"/>
+    <p:sldId id="259" r:id="rId9"/>
+    <p:sldId id="260" r:id="rId10"/>
+    <p:sldId id="272" r:id="rId11"/>
+    <p:sldId id="273" r:id="rId12"/>
+    <p:sldId id="274" r:id="rId13"/>
+    <p:sldId id="275" r:id="rId14"/>
+    <p:sldId id="276" r:id="rId15"/>
+    <p:sldId id="277" r:id="rId16"/>
+    <p:sldId id="278" r:id="rId17"/>
+    <p:sldId id="279" r:id="rId18"/>
+    <p:sldId id="280" r:id="rId19"/>
+    <p:sldId id="281" r:id="rId20"/>
+    <p:sldId id="282" r:id="rId21"/>
+    <p:sldId id="261" r:id="rId22"/>
+    <p:sldId id="263" r:id="rId23"/>
+    <p:sldId id="262" r:id="rId24"/>
+    <p:sldId id="265" r:id="rId25"/>
+    <p:sldId id="266" r:id="rId26"/>
+    <p:sldId id="267" r:id="rId27"/>
+    <p:sldId id="268" r:id="rId28"/>
+    <p:sldId id="269" r:id="rId29"/>
+    <p:sldId id="270" r:id="rId30"/>
+    <p:sldId id="264" r:id="rId31"/>
   </p:sldIdLst>
   <p:sldSz cx="12192000" cy="6858000"/>
   <p:notesSz cx="6858000" cy="9144000"/>
@@ -3509,21 +3525,16 @@
           <a:lstStyle/>
           <a:p>
             <a:r>
-              <a:rPr lang="ru-RU" dirty="0" smtClean="0"/>
-              <a:t>Как провести </a:t>
-            </a:r>
-            <a:r>
-              <a:rPr lang="ru-RU" dirty="0" err="1" smtClean="0"/>
-              <a:t>исселдование</a:t>
-            </a:r>
-            <a:r>
-              <a:rPr lang="ru-RU" dirty="0" smtClean="0"/>
-              <a:t> с </a:t>
-            </a:r>
-            <a:r>
-              <a:rPr lang="ru-RU" dirty="0" err="1" smtClean="0"/>
-              <a:t>ии</a:t>
-            </a:r>
+              <a:rPr lang="en-US" dirty="0" err="1" smtClean="0"/>
+              <a:t>harnes</a:t>
+            </a:r>
+            <a:r>
+              <a:rPr lang="en-US" dirty="0" smtClean="0"/>
+              <a:t> engineering</a:t>
+            </a:r>
+            <a:br>
+              <a:rPr lang="en-US" dirty="0" smtClean="0"/>
+            </a:br>
             <a:endParaRPr lang="ru-RU" dirty="0"/>
           </a:p>
         </p:txBody>
@@ -3538,19 +3549,31 @@
             <p:ph idx="1"/>
           </p:nvPr>
         </p:nvSpPr>
-        <p:spPr/>
-        <p:txBody>
-          <a:bodyPr/>
-          <a:lstStyle/>
-          <a:p>
-            <a:endParaRPr lang="ru-RU"/>
+        <p:spPr>
+          <a:xfrm>
+            <a:off x="571500" y="1368425"/>
+            <a:ext cx="11334750" cy="5137150"/>
+          </a:xfrm>
+        </p:spPr>
+        <p:txBody>
+          <a:bodyPr/>
+          <a:lstStyle/>
+          <a:p>
+            <a:r>
+              <a:rPr lang="en-US" dirty="0" smtClean="0"/>
+              <a:t> </a:t>
+            </a:r>
+            <a:endParaRPr lang="ru-RU" dirty="0" smtClean="0"/>
+          </a:p>
+          <a:p>
+            <a:endParaRPr lang="ru-RU" dirty="0"/>
           </a:p>
         </p:txBody>
       </p:sp>
     </p:spTree>
     <p:extLst>
       <p:ext uri="{BB962C8B-B14F-4D97-AF65-F5344CB8AC3E}">
-        <p14:creationId xmlns:p14="http://schemas.microsoft.com/office/powerpoint/2010/main" val="2475489762"/>
+        <p14:creationId xmlns:p14="http://schemas.microsoft.com/office/powerpoint/2010/main" val="2659100820"/>
       </p:ext>
     </p:extLst>
   </p:cSld>
@@ -3600,13 +3623,16 @@
           <a:lstStyle/>
           <a:p>
             <a:r>
-              <a:rPr lang="ru-RU" dirty="0" smtClean="0"/>
-              <a:t>Как оценить результаты исследования с </a:t>
-            </a:r>
-            <a:r>
-              <a:rPr lang="ru-RU" dirty="0" err="1" smtClean="0"/>
-              <a:t>ии</a:t>
-            </a:r>
+              <a:rPr lang="en-US" dirty="0" smtClean="0"/>
+              <a:t>loop</a:t>
+            </a:r>
+            <a:r>
+              <a:rPr lang="en-US" dirty="0" smtClean="0"/>
+              <a:t> engineering</a:t>
+            </a:r>
+            <a:br>
+              <a:rPr lang="en-US" dirty="0" smtClean="0"/>
+            </a:br>
             <a:endParaRPr lang="ru-RU" dirty="0"/>
           </a:p>
         </p:txBody>
@@ -3621,19 +3647,31 @@
             <p:ph idx="1"/>
           </p:nvPr>
         </p:nvSpPr>
-        <p:spPr/>
-        <p:txBody>
-          <a:bodyPr/>
-          <a:lstStyle/>
-          <a:p>
-            <a:endParaRPr lang="ru-RU"/>
+        <p:spPr>
+          <a:xfrm>
+            <a:off x="571500" y="1368425"/>
+            <a:ext cx="11334750" cy="5137150"/>
+          </a:xfrm>
+        </p:spPr>
+        <p:txBody>
+          <a:bodyPr/>
+          <a:lstStyle/>
+          <a:p>
+            <a:r>
+              <a:rPr lang="en-US" dirty="0" smtClean="0"/>
+              <a:t> </a:t>
+            </a:r>
+            <a:endParaRPr lang="ru-RU" dirty="0" smtClean="0"/>
+          </a:p>
+          <a:p>
+            <a:endParaRPr lang="ru-RU" dirty="0"/>
           </a:p>
         </p:txBody>
       </p:sp>
     </p:spTree>
     <p:extLst>
       <p:ext uri="{BB962C8B-B14F-4D97-AF65-F5344CB8AC3E}">
-        <p14:creationId xmlns:p14="http://schemas.microsoft.com/office/powerpoint/2010/main" val="769192809"/>
+        <p14:creationId xmlns:p14="http://schemas.microsoft.com/office/powerpoint/2010/main" val="3506941021"/>
       </p:ext>
     </p:extLst>
   </p:cSld>
@@ -3684,11 +3722,11 @@
           <a:p>
             <a:r>
               <a:rPr lang="ru-RU" dirty="0" smtClean="0"/>
-              <a:t>Как тестировать результаты исследований с </a:t>
+              <a:t>Создание </a:t>
             </a:r>
             <a:r>
               <a:rPr lang="ru-RU" dirty="0" err="1" smtClean="0"/>
-              <a:t>ии</a:t>
+              <a:t>скилов</a:t>
             </a:r>
             <a:endParaRPr lang="ru-RU" dirty="0"/>
           </a:p>
@@ -3716,7 +3754,7 @@
     </p:spTree>
     <p:extLst>
       <p:ext uri="{BB962C8B-B14F-4D97-AF65-F5344CB8AC3E}">
-        <p14:creationId xmlns:p14="http://schemas.microsoft.com/office/powerpoint/2010/main" val="470611769"/>
+        <p14:creationId xmlns:p14="http://schemas.microsoft.com/office/powerpoint/2010/main" val="2673798805"/>
       </p:ext>
     </p:extLst>
   </p:cSld>
@@ -3767,11 +3805,7 @@
           <a:p>
             <a:r>
               <a:rPr lang="ru-RU" dirty="0" smtClean="0"/>
-              <a:t>Как составить отчет с </a:t>
-            </a:r>
-            <a:r>
-              <a:rPr lang="ru-RU" dirty="0" err="1" smtClean="0"/>
-              <a:t>ии</a:t>
+              <a:t>Создание чего то еще</a:t>
             </a:r>
             <a:endParaRPr lang="ru-RU" dirty="0"/>
           </a:p>
@@ -3799,7 +3833,7 @@
     </p:spTree>
     <p:extLst>
       <p:ext uri="{BB962C8B-B14F-4D97-AF65-F5344CB8AC3E}">
-        <p14:creationId xmlns:p14="http://schemas.microsoft.com/office/powerpoint/2010/main" val="3015810689"/>
+        <p14:creationId xmlns:p14="http://schemas.microsoft.com/office/powerpoint/2010/main" val="2882388191"/>
       </p:ext>
     </p:extLst>
   </p:cSld>
@@ -3843,19 +3877,14 @@
             <p:ph type="title"/>
           </p:nvPr>
         </p:nvSpPr>
-        <p:spPr>
-          <a:xfrm>
-            <a:off x="381000" y="365125"/>
-            <a:ext cx="10972800" cy="892175"/>
-          </a:xfrm>
-        </p:spPr>
+        <p:spPr/>
         <p:txBody>
           <a:bodyPr/>
           <a:lstStyle/>
           <a:p>
             <a:r>
               <a:rPr lang="ru-RU" dirty="0" smtClean="0"/>
-              <a:t>Советы </a:t>
+              <a:t>память</a:t>
             </a:r>
             <a:endParaRPr lang="ru-RU" dirty="0"/>
           </a:p>
@@ -3871,46 +3900,414 @@
             <p:ph idx="1"/>
           </p:nvPr>
         </p:nvSpPr>
-        <p:spPr>
-          <a:xfrm>
-            <a:off x="381000" y="1257300"/>
-            <a:ext cx="10515600" cy="4351338"/>
-          </a:xfrm>
-        </p:spPr>
-        <p:txBody>
-          <a:bodyPr/>
-          <a:lstStyle/>
-          <a:p>
-            <a:r>
-              <a:rPr lang="ru-RU" dirty="0" smtClean="0"/>
-              <a:t>Следует тратить 20% времени на исследования и </a:t>
-            </a:r>
-            <a:r>
-              <a:rPr lang="ru-RU" dirty="0" err="1" smtClean="0"/>
-              <a:t>кодинг</a:t>
-            </a:r>
-            <a:r>
-              <a:rPr lang="ru-RU" dirty="0" smtClean="0"/>
-              <a:t> самостоятельно </a:t>
-            </a:r>
-          </a:p>
-          <a:p>
-            <a:r>
-              <a:rPr lang="ru-RU" dirty="0" smtClean="0"/>
-              <a:t>Важна </a:t>
-            </a:r>
-            <a:r>
-              <a:rPr lang="ru-RU" dirty="0" err="1" smtClean="0"/>
-              <a:t>насмотренность</a:t>
-            </a:r>
-            <a:endParaRPr lang="ru-RU" dirty="0"/>
+        <p:spPr/>
+        <p:txBody>
+          <a:bodyPr/>
+          <a:lstStyle/>
+          <a:p>
+            <a:endParaRPr lang="ru-RU"/>
           </a:p>
         </p:txBody>
       </p:sp>
     </p:spTree>
     <p:extLst>
       <p:ext uri="{BB962C8B-B14F-4D97-AF65-F5344CB8AC3E}">
-        <p14:creationId xmlns:p14="http://schemas.microsoft.com/office/powerpoint/2010/main" val="1427291924"/>
+        <p14:creationId xmlns:p14="http://schemas.microsoft.com/office/powerpoint/2010/main" val="9229396"/>
+      </p:ext>
+    </p:extLst>
+  </p:cSld>
+  <p:clrMapOvr>
+    <a:masterClrMapping/>
+  </p:clrMapOvr>
+  <p:timing>
+    <p:tnLst>
+      <p:par>
+        <p:cTn id="1" dur="indefinite" restart="never" nodeType="tmRoot"/>
+      </p:par>
+    </p:tnLst>
+  </p:timing>
+</p:sld>
+</file>
+
+<file path=ppt/slides/slide15.xml><?xml version="1.0" encoding="utf-8"?>
+<p:sld xmlns:a="http://schemas.openxmlformats.org/drawingml/2006/main" xmlns:r="http://schemas.openxmlformats.org/officeDocument/2006/relationships" xmlns:p="http://schemas.openxmlformats.org/presentationml/2006/main">
+  <p:cSld>
+    <p:spTree>
+      <p:nvGrpSpPr>
+        <p:cNvPr id="1" name=""/>
+        <p:cNvGrpSpPr/>
+        <p:nvPr/>
+      </p:nvGrpSpPr>
+      <p:grpSpPr>
+        <a:xfrm>
+          <a:off x="0" y="0"/>
+          <a:ext cx="0" cy="0"/>
+          <a:chOff x="0" y="0"/>
+          <a:chExt cx="0" cy="0"/>
+        </a:xfrm>
+      </p:grpSpPr>
+      <p:sp>
+        <p:nvSpPr>
+          <p:cNvPr id="2" name="Заголовок 1"/>
+          <p:cNvSpPr>
+            <a:spLocks noGrp="1"/>
+          </p:cNvSpPr>
+          <p:nvPr>
+            <p:ph type="title"/>
+          </p:nvPr>
+        </p:nvSpPr>
+        <p:spPr/>
+        <p:txBody>
+          <a:bodyPr/>
+          <a:lstStyle/>
+          <a:p>
+            <a:r>
+              <a:rPr lang="ru-RU" dirty="0" smtClean="0"/>
+              <a:t>Архитектуры агентов</a:t>
+            </a:r>
+            <a:endParaRPr lang="ru-RU" dirty="0"/>
+          </a:p>
+        </p:txBody>
+      </p:sp>
+      <p:sp>
+        <p:nvSpPr>
+          <p:cNvPr id="3" name="Объект 2"/>
+          <p:cNvSpPr>
+            <a:spLocks noGrp="1"/>
+          </p:cNvSpPr>
+          <p:nvPr>
+            <p:ph idx="1"/>
+          </p:nvPr>
+        </p:nvSpPr>
+        <p:spPr/>
+        <p:txBody>
+          <a:bodyPr/>
+          <a:lstStyle/>
+          <a:p>
+            <a:endParaRPr lang="ru-RU"/>
+          </a:p>
+        </p:txBody>
+      </p:sp>
+    </p:spTree>
+    <p:extLst>
+      <p:ext uri="{BB962C8B-B14F-4D97-AF65-F5344CB8AC3E}">
+        <p14:creationId xmlns:p14="http://schemas.microsoft.com/office/powerpoint/2010/main" val="3838850824"/>
+      </p:ext>
+    </p:extLst>
+  </p:cSld>
+  <p:clrMapOvr>
+    <a:masterClrMapping/>
+  </p:clrMapOvr>
+  <p:timing>
+    <p:tnLst>
+      <p:par>
+        <p:cTn id="1" dur="indefinite" restart="never" nodeType="tmRoot"/>
+      </p:par>
+    </p:tnLst>
+  </p:timing>
+</p:sld>
+</file>
+
+<file path=ppt/slides/slide16.xml><?xml version="1.0" encoding="utf-8"?>
+<p:sld xmlns:a="http://schemas.openxmlformats.org/drawingml/2006/main" xmlns:r="http://schemas.openxmlformats.org/officeDocument/2006/relationships" xmlns:p="http://schemas.openxmlformats.org/presentationml/2006/main">
+  <p:cSld>
+    <p:spTree>
+      <p:nvGrpSpPr>
+        <p:cNvPr id="1" name=""/>
+        <p:cNvGrpSpPr/>
+        <p:nvPr/>
+      </p:nvGrpSpPr>
+      <p:grpSpPr>
+        <a:xfrm>
+          <a:off x="0" y="0"/>
+          <a:ext cx="0" cy="0"/>
+          <a:chOff x="0" y="0"/>
+          <a:chExt cx="0" cy="0"/>
+        </a:xfrm>
+      </p:grpSpPr>
+      <p:sp>
+        <p:nvSpPr>
+          <p:cNvPr id="2" name="Заголовок 1"/>
+          <p:cNvSpPr>
+            <a:spLocks noGrp="1"/>
+          </p:cNvSpPr>
+          <p:nvPr>
+            <p:ph type="title"/>
+          </p:nvPr>
+        </p:nvSpPr>
+        <p:spPr/>
+        <p:txBody>
+          <a:bodyPr/>
+          <a:lstStyle/>
+          <a:p>
+            <a:r>
+              <a:rPr lang="ru-RU" dirty="0" smtClean="0"/>
+              <a:t>Работа с специфичными данными</a:t>
+            </a:r>
+            <a:endParaRPr lang="ru-RU" dirty="0"/>
+          </a:p>
+        </p:txBody>
+      </p:sp>
+      <p:sp>
+        <p:nvSpPr>
+          <p:cNvPr id="3" name="Объект 2"/>
+          <p:cNvSpPr>
+            <a:spLocks noGrp="1"/>
+          </p:cNvSpPr>
+          <p:nvPr>
+            <p:ph idx="1"/>
+          </p:nvPr>
+        </p:nvSpPr>
+        <p:spPr/>
+        <p:txBody>
+          <a:bodyPr/>
+          <a:lstStyle/>
+          <a:p>
+            <a:endParaRPr lang="ru-RU"/>
+          </a:p>
+        </p:txBody>
+      </p:sp>
+    </p:spTree>
+    <p:extLst>
+      <p:ext uri="{BB962C8B-B14F-4D97-AF65-F5344CB8AC3E}">
+        <p14:creationId xmlns:p14="http://schemas.microsoft.com/office/powerpoint/2010/main" val="1921224473"/>
+      </p:ext>
+    </p:extLst>
+  </p:cSld>
+  <p:clrMapOvr>
+    <a:masterClrMapping/>
+  </p:clrMapOvr>
+  <p:timing>
+    <p:tnLst>
+      <p:par>
+        <p:cTn id="1" dur="indefinite" restart="never" nodeType="tmRoot"/>
+      </p:par>
+    </p:tnLst>
+  </p:timing>
+</p:sld>
+</file>
+
+<file path=ppt/slides/slide17.xml><?xml version="1.0" encoding="utf-8"?>
+<p:sld xmlns:a="http://schemas.openxmlformats.org/drawingml/2006/main" xmlns:r="http://schemas.openxmlformats.org/officeDocument/2006/relationships" xmlns:p="http://schemas.openxmlformats.org/presentationml/2006/main">
+  <p:cSld>
+    <p:spTree>
+      <p:nvGrpSpPr>
+        <p:cNvPr id="1" name=""/>
+        <p:cNvGrpSpPr/>
+        <p:nvPr/>
+      </p:nvGrpSpPr>
+      <p:grpSpPr>
+        <a:xfrm>
+          <a:off x="0" y="0"/>
+          <a:ext cx="0" cy="0"/>
+          <a:chOff x="0" y="0"/>
+          <a:chExt cx="0" cy="0"/>
+        </a:xfrm>
+      </p:grpSpPr>
+      <p:sp>
+        <p:nvSpPr>
+          <p:cNvPr id="2" name="Заголовок 1"/>
+          <p:cNvSpPr>
+            <a:spLocks noGrp="1"/>
+          </p:cNvSpPr>
+          <p:nvPr>
+            <p:ph type="title"/>
+          </p:nvPr>
+        </p:nvSpPr>
+        <p:spPr/>
+        <p:txBody>
+          <a:bodyPr/>
+          <a:lstStyle/>
+          <a:p>
+            <a:r>
+              <a:rPr lang="ru-RU" dirty="0" smtClean="0"/>
+              <a:t>Что то еще</a:t>
+            </a:r>
+            <a:endParaRPr lang="ru-RU" dirty="0"/>
+          </a:p>
+        </p:txBody>
+      </p:sp>
+      <p:sp>
+        <p:nvSpPr>
+          <p:cNvPr id="3" name="Объект 2"/>
+          <p:cNvSpPr>
+            <a:spLocks noGrp="1"/>
+          </p:cNvSpPr>
+          <p:nvPr>
+            <p:ph idx="1"/>
+          </p:nvPr>
+        </p:nvSpPr>
+        <p:spPr/>
+        <p:txBody>
+          <a:bodyPr/>
+          <a:lstStyle/>
+          <a:p>
+            <a:endParaRPr lang="ru-RU"/>
+          </a:p>
+        </p:txBody>
+      </p:sp>
+    </p:spTree>
+    <p:extLst>
+      <p:ext uri="{BB962C8B-B14F-4D97-AF65-F5344CB8AC3E}">
+        <p14:creationId xmlns:p14="http://schemas.microsoft.com/office/powerpoint/2010/main" val="2418938059"/>
+      </p:ext>
+    </p:extLst>
+  </p:cSld>
+  <p:clrMapOvr>
+    <a:masterClrMapping/>
+  </p:clrMapOvr>
+  <p:timing>
+    <p:tnLst>
+      <p:par>
+        <p:cTn id="1" dur="indefinite" restart="never" nodeType="tmRoot"/>
+      </p:par>
+    </p:tnLst>
+  </p:timing>
+</p:sld>
+</file>
+
+<file path=ppt/slides/slide18.xml><?xml version="1.0" encoding="utf-8"?>
+<p:sld xmlns:a="http://schemas.openxmlformats.org/drawingml/2006/main" xmlns:r="http://schemas.openxmlformats.org/officeDocument/2006/relationships" xmlns:p="http://schemas.openxmlformats.org/presentationml/2006/main">
+  <p:cSld>
+    <p:spTree>
+      <p:nvGrpSpPr>
+        <p:cNvPr id="1" name=""/>
+        <p:cNvGrpSpPr/>
+        <p:nvPr/>
+      </p:nvGrpSpPr>
+      <p:grpSpPr>
+        <a:xfrm>
+          <a:off x="0" y="0"/>
+          <a:ext cx="0" cy="0"/>
+          <a:chOff x="0" y="0"/>
+          <a:chExt cx="0" cy="0"/>
+        </a:xfrm>
+      </p:grpSpPr>
+      <p:sp>
+        <p:nvSpPr>
+          <p:cNvPr id="2" name="Заголовок 1"/>
+          <p:cNvSpPr>
+            <a:spLocks noGrp="1"/>
+          </p:cNvSpPr>
+          <p:nvPr>
+            <p:ph type="title"/>
+          </p:nvPr>
+        </p:nvSpPr>
+        <p:spPr/>
+        <p:txBody>
+          <a:bodyPr/>
+          <a:lstStyle/>
+          <a:p>
+            <a:r>
+              <a:rPr lang="ru-RU" dirty="0" smtClean="0"/>
+              <a:t>Как задокументировать наработки с ИИ</a:t>
+            </a:r>
+            <a:endParaRPr lang="ru-RU" dirty="0"/>
+          </a:p>
+        </p:txBody>
+      </p:sp>
+      <p:sp>
+        <p:nvSpPr>
+          <p:cNvPr id="3" name="Объект 2"/>
+          <p:cNvSpPr>
+            <a:spLocks noGrp="1"/>
+          </p:cNvSpPr>
+          <p:nvPr>
+            <p:ph idx="1"/>
+          </p:nvPr>
+        </p:nvSpPr>
+        <p:spPr/>
+        <p:txBody>
+          <a:bodyPr/>
+          <a:lstStyle/>
+          <a:p>
+            <a:endParaRPr lang="ru-RU"/>
+          </a:p>
+        </p:txBody>
+      </p:sp>
+    </p:spTree>
+    <p:extLst>
+      <p:ext uri="{BB962C8B-B14F-4D97-AF65-F5344CB8AC3E}">
+        <p14:creationId xmlns:p14="http://schemas.microsoft.com/office/powerpoint/2010/main" val="549277791"/>
+      </p:ext>
+    </p:extLst>
+  </p:cSld>
+  <p:clrMapOvr>
+    <a:masterClrMapping/>
+  </p:clrMapOvr>
+  <p:timing>
+    <p:tnLst>
+      <p:par>
+        <p:cTn id="1" dur="indefinite" restart="never" nodeType="tmRoot"/>
+      </p:par>
+    </p:tnLst>
+  </p:timing>
+</p:sld>
+</file>
+
+<file path=ppt/slides/slide19.xml><?xml version="1.0" encoding="utf-8"?>
+<p:sld xmlns:a="http://schemas.openxmlformats.org/drawingml/2006/main" xmlns:r="http://schemas.openxmlformats.org/officeDocument/2006/relationships" xmlns:p="http://schemas.openxmlformats.org/presentationml/2006/main">
+  <p:cSld>
+    <p:spTree>
+      <p:nvGrpSpPr>
+        <p:cNvPr id="1" name=""/>
+        <p:cNvGrpSpPr/>
+        <p:nvPr/>
+      </p:nvGrpSpPr>
+      <p:grpSpPr>
+        <a:xfrm>
+          <a:off x="0" y="0"/>
+          <a:ext cx="0" cy="0"/>
+          <a:chOff x="0" y="0"/>
+          <a:chExt cx="0" cy="0"/>
+        </a:xfrm>
+      </p:grpSpPr>
+      <p:sp>
+        <p:nvSpPr>
+          <p:cNvPr id="2" name="Заголовок 1"/>
+          <p:cNvSpPr>
+            <a:spLocks noGrp="1"/>
+          </p:cNvSpPr>
+          <p:nvPr>
+            <p:ph type="title"/>
+          </p:nvPr>
+        </p:nvSpPr>
+        <p:spPr/>
+        <p:txBody>
+          <a:bodyPr/>
+          <a:lstStyle/>
+          <a:p>
+            <a:r>
+              <a:rPr lang="ru-RU" dirty="0" smtClean="0"/>
+              <a:t>Как собрать запрос и учесть то что уже наработал</a:t>
+            </a:r>
+            <a:endParaRPr lang="ru-RU" dirty="0"/>
+          </a:p>
+        </p:txBody>
+      </p:sp>
+      <p:sp>
+        <p:nvSpPr>
+          <p:cNvPr id="3" name="Объект 2"/>
+          <p:cNvSpPr>
+            <a:spLocks noGrp="1"/>
+          </p:cNvSpPr>
+          <p:nvPr>
+            <p:ph idx="1"/>
+          </p:nvPr>
+        </p:nvSpPr>
+        <p:spPr/>
+        <p:txBody>
+          <a:bodyPr/>
+          <a:lstStyle/>
+          <a:p>
+            <a:endParaRPr lang="ru-RU"/>
+          </a:p>
+        </p:txBody>
+      </p:sp>
+    </p:spTree>
+    <p:extLst>
+      <p:ext uri="{BB962C8B-B14F-4D97-AF65-F5344CB8AC3E}">
+        <p14:creationId xmlns:p14="http://schemas.microsoft.com/office/powerpoint/2010/main" val="3960231460"/>
       </p:ext>
     </p:extLst>
   </p:cSld>
@@ -4074,6 +4471,894 @@
 </p:sld>
 </file>
 
+<file path=ppt/slides/slide20.xml><?xml version="1.0" encoding="utf-8"?>
+<p:sld xmlns:a="http://schemas.openxmlformats.org/drawingml/2006/main" xmlns:r="http://schemas.openxmlformats.org/officeDocument/2006/relationships" xmlns:p="http://schemas.openxmlformats.org/presentationml/2006/main">
+  <p:cSld>
+    <p:spTree>
+      <p:nvGrpSpPr>
+        <p:cNvPr id="1" name=""/>
+        <p:cNvGrpSpPr/>
+        <p:nvPr/>
+      </p:nvGrpSpPr>
+      <p:grpSpPr>
+        <a:xfrm>
+          <a:off x="0" y="0"/>
+          <a:ext cx="0" cy="0"/>
+          <a:chOff x="0" y="0"/>
+          <a:chExt cx="0" cy="0"/>
+        </a:xfrm>
+      </p:grpSpPr>
+      <p:sp>
+        <p:nvSpPr>
+          <p:cNvPr id="2" name="Заголовок 1"/>
+          <p:cNvSpPr>
+            <a:spLocks noGrp="1"/>
+          </p:cNvSpPr>
+          <p:nvPr>
+            <p:ph type="title"/>
+          </p:nvPr>
+        </p:nvSpPr>
+        <p:spPr/>
+        <p:txBody>
+          <a:bodyPr/>
+          <a:lstStyle/>
+          <a:p>
+            <a:r>
+              <a:rPr lang="ru-RU" dirty="0" smtClean="0"/>
+              <a:t>Еще о </a:t>
+            </a:r>
+            <a:r>
+              <a:rPr lang="ru-RU" dirty="0" err="1" smtClean="0"/>
+              <a:t>воспроизводимости</a:t>
+            </a:r>
+            <a:r>
+              <a:rPr lang="ru-RU" dirty="0" smtClean="0"/>
+              <a:t> работы с агентами</a:t>
+            </a:r>
+            <a:endParaRPr lang="ru-RU" dirty="0"/>
+          </a:p>
+        </p:txBody>
+      </p:sp>
+      <p:sp>
+        <p:nvSpPr>
+          <p:cNvPr id="3" name="Объект 2"/>
+          <p:cNvSpPr>
+            <a:spLocks noGrp="1"/>
+          </p:cNvSpPr>
+          <p:nvPr>
+            <p:ph idx="1"/>
+          </p:nvPr>
+        </p:nvSpPr>
+        <p:spPr/>
+        <p:txBody>
+          <a:bodyPr/>
+          <a:lstStyle/>
+          <a:p>
+            <a:endParaRPr lang="ru-RU"/>
+          </a:p>
+        </p:txBody>
+      </p:sp>
+    </p:spTree>
+    <p:extLst>
+      <p:ext uri="{BB962C8B-B14F-4D97-AF65-F5344CB8AC3E}">
+        <p14:creationId xmlns:p14="http://schemas.microsoft.com/office/powerpoint/2010/main" val="825944399"/>
+      </p:ext>
+    </p:extLst>
+  </p:cSld>
+  <p:clrMapOvr>
+    <a:masterClrMapping/>
+  </p:clrMapOvr>
+  <p:timing>
+    <p:tnLst>
+      <p:par>
+        <p:cTn id="1" dur="indefinite" restart="never" nodeType="tmRoot"/>
+      </p:par>
+    </p:tnLst>
+  </p:timing>
+</p:sld>
+</file>
+
+<file path=ppt/slides/slide21.xml><?xml version="1.0" encoding="utf-8"?>
+<p:sld xmlns:a="http://schemas.openxmlformats.org/drawingml/2006/main" xmlns:r="http://schemas.openxmlformats.org/officeDocument/2006/relationships" xmlns:p="http://schemas.openxmlformats.org/presentationml/2006/main">
+  <p:cSld>
+    <p:spTree>
+      <p:nvGrpSpPr>
+        <p:cNvPr id="1" name=""/>
+        <p:cNvGrpSpPr/>
+        <p:nvPr/>
+      </p:nvGrpSpPr>
+      <p:grpSpPr>
+        <a:xfrm>
+          <a:off x="0" y="0"/>
+          <a:ext cx="0" cy="0"/>
+          <a:chOff x="0" y="0"/>
+          <a:chExt cx="0" cy="0"/>
+        </a:xfrm>
+      </p:grpSpPr>
+      <p:sp>
+        <p:nvSpPr>
+          <p:cNvPr id="2" name="Заголовок 1"/>
+          <p:cNvSpPr>
+            <a:spLocks noGrp="1"/>
+          </p:cNvSpPr>
+          <p:nvPr>
+            <p:ph type="title"/>
+          </p:nvPr>
+        </p:nvSpPr>
+        <p:spPr>
+          <a:xfrm>
+            <a:off x="361950" y="365126"/>
+            <a:ext cx="10991850" cy="749300"/>
+          </a:xfrm>
+        </p:spPr>
+        <p:txBody>
+          <a:bodyPr/>
+          <a:lstStyle/>
+          <a:p>
+            <a:r>
+              <a:rPr lang="ru-RU" dirty="0" smtClean="0"/>
+              <a:t>Разработка через спецификацию</a:t>
+            </a:r>
+            <a:endParaRPr lang="ru-RU" dirty="0"/>
+          </a:p>
+        </p:txBody>
+      </p:sp>
+      <p:sp>
+        <p:nvSpPr>
+          <p:cNvPr id="3" name="Объект 2"/>
+          <p:cNvSpPr>
+            <a:spLocks noGrp="1"/>
+          </p:cNvSpPr>
+          <p:nvPr>
+            <p:ph idx="1"/>
+          </p:nvPr>
+        </p:nvSpPr>
+        <p:spPr>
+          <a:xfrm>
+            <a:off x="361949" y="1216025"/>
+            <a:ext cx="11534775" cy="5346700"/>
+          </a:xfrm>
+        </p:spPr>
+        <p:txBody>
+          <a:bodyPr/>
+          <a:lstStyle/>
+          <a:p>
+            <a:endParaRPr lang="ru-RU" dirty="0"/>
+          </a:p>
+        </p:txBody>
+      </p:sp>
+    </p:spTree>
+    <p:extLst>
+      <p:ext uri="{BB962C8B-B14F-4D97-AF65-F5344CB8AC3E}">
+        <p14:creationId xmlns:p14="http://schemas.microsoft.com/office/powerpoint/2010/main" val="2560986178"/>
+      </p:ext>
+    </p:extLst>
+  </p:cSld>
+  <p:clrMapOvr>
+    <a:masterClrMapping/>
+  </p:clrMapOvr>
+  <p:timing>
+    <p:tnLst>
+      <p:par>
+        <p:cTn id="1" dur="indefinite" restart="never" nodeType="tmRoot"/>
+      </p:par>
+    </p:tnLst>
+  </p:timing>
+</p:sld>
+</file>
+
+<file path=ppt/slides/slide22.xml><?xml version="1.0" encoding="utf-8"?>
+<p:sld xmlns:a="http://schemas.openxmlformats.org/drawingml/2006/main" xmlns:r="http://schemas.openxmlformats.org/officeDocument/2006/relationships" xmlns:p="http://schemas.openxmlformats.org/presentationml/2006/main">
+  <p:cSld>
+    <p:spTree>
+      <p:nvGrpSpPr>
+        <p:cNvPr id="1" name=""/>
+        <p:cNvGrpSpPr/>
+        <p:nvPr/>
+      </p:nvGrpSpPr>
+      <p:grpSpPr>
+        <a:xfrm>
+          <a:off x="0" y="0"/>
+          <a:ext cx="0" cy="0"/>
+          <a:chOff x="0" y="0"/>
+          <a:chExt cx="0" cy="0"/>
+        </a:xfrm>
+      </p:grpSpPr>
+      <p:sp>
+        <p:nvSpPr>
+          <p:cNvPr id="2" name="Заголовок 1"/>
+          <p:cNvSpPr>
+            <a:spLocks noGrp="1"/>
+          </p:cNvSpPr>
+          <p:nvPr>
+            <p:ph type="title"/>
+          </p:nvPr>
+        </p:nvSpPr>
+        <p:spPr>
+          <a:xfrm>
+            <a:off x="838200" y="365126"/>
+            <a:ext cx="10515600" cy="882650"/>
+          </a:xfrm>
+        </p:spPr>
+        <p:txBody>
+          <a:bodyPr/>
+          <a:lstStyle/>
+          <a:p>
+            <a:r>
+              <a:rPr lang="ru-RU" dirty="0" smtClean="0"/>
+              <a:t>Разработка на основе тестов в эпоху ИИ</a:t>
+            </a:r>
+            <a:endParaRPr lang="ru-RU" dirty="0"/>
+          </a:p>
+        </p:txBody>
+      </p:sp>
+      <p:sp>
+        <p:nvSpPr>
+          <p:cNvPr id="3" name="Объект 2"/>
+          <p:cNvSpPr>
+            <a:spLocks noGrp="1"/>
+          </p:cNvSpPr>
+          <p:nvPr>
+            <p:ph idx="1"/>
+          </p:nvPr>
+        </p:nvSpPr>
+        <p:spPr>
+          <a:xfrm>
+            <a:off x="228599" y="1247776"/>
+            <a:ext cx="11534775" cy="4984750"/>
+          </a:xfrm>
+        </p:spPr>
+        <p:txBody>
+          <a:bodyPr/>
+          <a:lstStyle/>
+          <a:p>
+            <a:r>
+              <a:rPr lang="ru-RU" dirty="0" smtClean="0"/>
+              <a:t>Важны и </a:t>
+            </a:r>
+            <a:r>
+              <a:rPr lang="en-US" dirty="0" smtClean="0"/>
+              <a:t>SDD (specification driven development)</a:t>
+            </a:r>
+          </a:p>
+          <a:p>
+            <a:r>
+              <a:rPr lang="ru-RU" dirty="0" smtClean="0"/>
+              <a:t>И </a:t>
+            </a:r>
+            <a:r>
+              <a:rPr lang="en-US" dirty="0"/>
+              <a:t>(</a:t>
+            </a:r>
+            <a:r>
+              <a:rPr lang="en-US" dirty="0" smtClean="0"/>
+              <a:t>Test driven </a:t>
+            </a:r>
+            <a:r>
+              <a:rPr lang="en-US" dirty="0" smtClean="0"/>
+              <a:t>development)</a:t>
+            </a:r>
+            <a:endParaRPr lang="ru-RU" dirty="0"/>
+          </a:p>
+        </p:txBody>
+      </p:sp>
+    </p:spTree>
+    <p:extLst>
+      <p:ext uri="{BB962C8B-B14F-4D97-AF65-F5344CB8AC3E}">
+        <p14:creationId xmlns:p14="http://schemas.microsoft.com/office/powerpoint/2010/main" val="3642863690"/>
+      </p:ext>
+    </p:extLst>
+  </p:cSld>
+  <p:clrMapOvr>
+    <a:masterClrMapping/>
+  </p:clrMapOvr>
+  <p:timing>
+    <p:tnLst>
+      <p:par>
+        <p:cTn id="1" dur="indefinite" restart="never" nodeType="tmRoot"/>
+      </p:par>
+    </p:tnLst>
+  </p:timing>
+</p:sld>
+</file>
+
+<file path=ppt/slides/slide23.xml><?xml version="1.0" encoding="utf-8"?>
+<p:sld xmlns:a="http://schemas.openxmlformats.org/drawingml/2006/main" xmlns:r="http://schemas.openxmlformats.org/officeDocument/2006/relationships" xmlns:p="http://schemas.openxmlformats.org/presentationml/2006/main">
+  <p:cSld>
+    <p:spTree>
+      <p:nvGrpSpPr>
+        <p:cNvPr id="1" name=""/>
+        <p:cNvGrpSpPr/>
+        <p:nvPr/>
+      </p:nvGrpSpPr>
+      <p:grpSpPr>
+        <a:xfrm>
+          <a:off x="0" y="0"/>
+          <a:ext cx="0" cy="0"/>
+          <a:chOff x="0" y="0"/>
+          <a:chExt cx="0" cy="0"/>
+        </a:xfrm>
+      </p:grpSpPr>
+      <p:sp>
+        <p:nvSpPr>
+          <p:cNvPr id="2" name="Заголовок 1"/>
+          <p:cNvSpPr>
+            <a:spLocks noGrp="1"/>
+          </p:cNvSpPr>
+          <p:nvPr>
+            <p:ph type="title"/>
+          </p:nvPr>
+        </p:nvSpPr>
+        <p:spPr>
+          <a:xfrm>
+            <a:off x="533400" y="476250"/>
+            <a:ext cx="10515600" cy="673100"/>
+          </a:xfrm>
+        </p:spPr>
+        <p:txBody>
+          <a:bodyPr>
+            <a:normAutofit fontScale="90000"/>
+          </a:bodyPr>
+          <a:lstStyle/>
+          <a:p>
+            <a:r>
+              <a:rPr lang="ru-RU" dirty="0" err="1" smtClean="0"/>
+              <a:t>Ревью</a:t>
+            </a:r>
+            <a:r>
+              <a:rPr lang="ru-RU" dirty="0" smtClean="0"/>
+              <a:t> ИИ</a:t>
+            </a:r>
+            <a:endParaRPr lang="ru-RU" dirty="0"/>
+          </a:p>
+        </p:txBody>
+      </p:sp>
+      <p:sp>
+        <p:nvSpPr>
+          <p:cNvPr id="3" name="Объект 2"/>
+          <p:cNvSpPr>
+            <a:spLocks noGrp="1"/>
+          </p:cNvSpPr>
+          <p:nvPr>
+            <p:ph idx="1"/>
+          </p:nvPr>
+        </p:nvSpPr>
+        <p:spPr>
+          <a:xfrm>
+            <a:off x="238125" y="1149350"/>
+            <a:ext cx="11582400" cy="5213350"/>
+          </a:xfrm>
+        </p:spPr>
+        <p:txBody>
+          <a:bodyPr/>
+          <a:lstStyle/>
+          <a:p>
+            <a:r>
+              <a:rPr lang="ru-RU" dirty="0" smtClean="0"/>
+              <a:t>ИИ создает куда больше контента чем человек может отследить</a:t>
+            </a:r>
+            <a:endParaRPr lang="ru-RU" dirty="0"/>
+          </a:p>
+        </p:txBody>
+      </p:sp>
+    </p:spTree>
+    <p:extLst>
+      <p:ext uri="{BB962C8B-B14F-4D97-AF65-F5344CB8AC3E}">
+        <p14:creationId xmlns:p14="http://schemas.microsoft.com/office/powerpoint/2010/main" val="3055655509"/>
+      </p:ext>
+    </p:extLst>
+  </p:cSld>
+  <p:clrMapOvr>
+    <a:masterClrMapping/>
+  </p:clrMapOvr>
+  <p:timing>
+    <p:tnLst>
+      <p:par>
+        <p:cTn id="1" dur="indefinite" restart="never" nodeType="tmRoot"/>
+      </p:par>
+    </p:tnLst>
+  </p:timing>
+</p:sld>
+</file>
+
+<file path=ppt/slides/slide24.xml><?xml version="1.0" encoding="utf-8"?>
+<p:sld xmlns:a="http://schemas.openxmlformats.org/drawingml/2006/main" xmlns:r="http://schemas.openxmlformats.org/officeDocument/2006/relationships" xmlns:p="http://schemas.openxmlformats.org/presentationml/2006/main">
+  <p:cSld>
+    <p:spTree>
+      <p:nvGrpSpPr>
+        <p:cNvPr id="1" name=""/>
+        <p:cNvGrpSpPr/>
+        <p:nvPr/>
+      </p:nvGrpSpPr>
+      <p:grpSpPr>
+        <a:xfrm>
+          <a:off x="0" y="0"/>
+          <a:ext cx="0" cy="0"/>
+          <a:chOff x="0" y="0"/>
+          <a:chExt cx="0" cy="0"/>
+        </a:xfrm>
+      </p:grpSpPr>
+      <p:sp>
+        <p:nvSpPr>
+          <p:cNvPr id="2" name="Заголовок 1"/>
+          <p:cNvSpPr>
+            <a:spLocks noGrp="1"/>
+          </p:cNvSpPr>
+          <p:nvPr>
+            <p:ph type="title"/>
+          </p:nvPr>
+        </p:nvSpPr>
+        <p:spPr/>
+        <p:txBody>
+          <a:bodyPr/>
+          <a:lstStyle/>
+          <a:p>
+            <a:r>
+              <a:rPr lang="ru-RU" dirty="0" smtClean="0"/>
+              <a:t>Как планировать исследование с </a:t>
+            </a:r>
+            <a:r>
+              <a:rPr lang="ru-RU" dirty="0" err="1" smtClean="0"/>
+              <a:t>ии</a:t>
+            </a:r>
+            <a:endParaRPr lang="ru-RU" dirty="0"/>
+          </a:p>
+        </p:txBody>
+      </p:sp>
+      <p:sp>
+        <p:nvSpPr>
+          <p:cNvPr id="3" name="Объект 2"/>
+          <p:cNvSpPr>
+            <a:spLocks noGrp="1"/>
+          </p:cNvSpPr>
+          <p:nvPr>
+            <p:ph idx="1"/>
+          </p:nvPr>
+        </p:nvSpPr>
+        <p:spPr/>
+        <p:txBody>
+          <a:bodyPr/>
+          <a:lstStyle/>
+          <a:p>
+            <a:endParaRPr lang="ru-RU" dirty="0"/>
+          </a:p>
+        </p:txBody>
+      </p:sp>
+    </p:spTree>
+    <p:extLst>
+      <p:ext uri="{BB962C8B-B14F-4D97-AF65-F5344CB8AC3E}">
+        <p14:creationId xmlns:p14="http://schemas.microsoft.com/office/powerpoint/2010/main" val="548751807"/>
+      </p:ext>
+    </p:extLst>
+  </p:cSld>
+  <p:clrMapOvr>
+    <a:masterClrMapping/>
+  </p:clrMapOvr>
+  <p:timing>
+    <p:tnLst>
+      <p:par>
+        <p:cTn id="1" dur="indefinite" restart="never" nodeType="tmRoot"/>
+      </p:par>
+    </p:tnLst>
+  </p:timing>
+</p:sld>
+</file>
+
+<file path=ppt/slides/slide25.xml><?xml version="1.0" encoding="utf-8"?>
+<p:sld xmlns:a="http://schemas.openxmlformats.org/drawingml/2006/main" xmlns:r="http://schemas.openxmlformats.org/officeDocument/2006/relationships" xmlns:p="http://schemas.openxmlformats.org/presentationml/2006/main">
+  <p:cSld>
+    <p:spTree>
+      <p:nvGrpSpPr>
+        <p:cNvPr id="1" name=""/>
+        <p:cNvGrpSpPr/>
+        <p:nvPr/>
+      </p:nvGrpSpPr>
+      <p:grpSpPr>
+        <a:xfrm>
+          <a:off x="0" y="0"/>
+          <a:ext cx="0" cy="0"/>
+          <a:chOff x="0" y="0"/>
+          <a:chExt cx="0" cy="0"/>
+        </a:xfrm>
+      </p:grpSpPr>
+      <p:sp>
+        <p:nvSpPr>
+          <p:cNvPr id="2" name="Заголовок 1"/>
+          <p:cNvSpPr>
+            <a:spLocks noGrp="1"/>
+          </p:cNvSpPr>
+          <p:nvPr>
+            <p:ph type="title"/>
+          </p:nvPr>
+        </p:nvSpPr>
+        <p:spPr/>
+        <p:txBody>
+          <a:bodyPr/>
+          <a:lstStyle/>
+          <a:p>
+            <a:r>
+              <a:rPr lang="ru-RU" dirty="0" smtClean="0"/>
+              <a:t>Как провести исследование с </a:t>
+            </a:r>
+            <a:r>
+              <a:rPr lang="ru-RU" dirty="0" err="1" smtClean="0"/>
+              <a:t>ии</a:t>
+            </a:r>
+            <a:endParaRPr lang="ru-RU" dirty="0"/>
+          </a:p>
+        </p:txBody>
+      </p:sp>
+      <p:sp>
+        <p:nvSpPr>
+          <p:cNvPr id="3" name="Объект 2"/>
+          <p:cNvSpPr>
+            <a:spLocks noGrp="1"/>
+          </p:cNvSpPr>
+          <p:nvPr>
+            <p:ph idx="1"/>
+          </p:nvPr>
+        </p:nvSpPr>
+        <p:spPr/>
+        <p:txBody>
+          <a:bodyPr/>
+          <a:lstStyle/>
+          <a:p>
+            <a:endParaRPr lang="ru-RU"/>
+          </a:p>
+        </p:txBody>
+      </p:sp>
+    </p:spTree>
+    <p:extLst>
+      <p:ext uri="{BB962C8B-B14F-4D97-AF65-F5344CB8AC3E}">
+        <p14:creationId xmlns:p14="http://schemas.microsoft.com/office/powerpoint/2010/main" val="2475489762"/>
+      </p:ext>
+    </p:extLst>
+  </p:cSld>
+  <p:clrMapOvr>
+    <a:masterClrMapping/>
+  </p:clrMapOvr>
+  <p:timing>
+    <p:tnLst>
+      <p:par>
+        <p:cTn id="1" dur="indefinite" restart="never" nodeType="tmRoot"/>
+      </p:par>
+    </p:tnLst>
+  </p:timing>
+</p:sld>
+</file>
+
+<file path=ppt/slides/slide26.xml><?xml version="1.0" encoding="utf-8"?>
+<p:sld xmlns:a="http://schemas.openxmlformats.org/drawingml/2006/main" xmlns:r="http://schemas.openxmlformats.org/officeDocument/2006/relationships" xmlns:p="http://schemas.openxmlformats.org/presentationml/2006/main">
+  <p:cSld>
+    <p:spTree>
+      <p:nvGrpSpPr>
+        <p:cNvPr id="1" name=""/>
+        <p:cNvGrpSpPr/>
+        <p:nvPr/>
+      </p:nvGrpSpPr>
+      <p:grpSpPr>
+        <a:xfrm>
+          <a:off x="0" y="0"/>
+          <a:ext cx="0" cy="0"/>
+          <a:chOff x="0" y="0"/>
+          <a:chExt cx="0" cy="0"/>
+        </a:xfrm>
+      </p:grpSpPr>
+      <p:sp>
+        <p:nvSpPr>
+          <p:cNvPr id="2" name="Заголовок 1"/>
+          <p:cNvSpPr>
+            <a:spLocks noGrp="1"/>
+          </p:cNvSpPr>
+          <p:nvPr>
+            <p:ph type="title"/>
+          </p:nvPr>
+        </p:nvSpPr>
+        <p:spPr/>
+        <p:txBody>
+          <a:bodyPr/>
+          <a:lstStyle/>
+          <a:p>
+            <a:r>
+              <a:rPr lang="ru-RU" dirty="0" smtClean="0"/>
+              <a:t>Как оценить результаты исследования с </a:t>
+            </a:r>
+            <a:r>
+              <a:rPr lang="ru-RU" dirty="0" err="1" smtClean="0"/>
+              <a:t>ии</a:t>
+            </a:r>
+            <a:endParaRPr lang="ru-RU" dirty="0"/>
+          </a:p>
+        </p:txBody>
+      </p:sp>
+      <p:sp>
+        <p:nvSpPr>
+          <p:cNvPr id="3" name="Объект 2"/>
+          <p:cNvSpPr>
+            <a:spLocks noGrp="1"/>
+          </p:cNvSpPr>
+          <p:nvPr>
+            <p:ph idx="1"/>
+          </p:nvPr>
+        </p:nvSpPr>
+        <p:spPr/>
+        <p:txBody>
+          <a:bodyPr/>
+          <a:lstStyle/>
+          <a:p>
+            <a:endParaRPr lang="ru-RU"/>
+          </a:p>
+        </p:txBody>
+      </p:sp>
+    </p:spTree>
+    <p:extLst>
+      <p:ext uri="{BB962C8B-B14F-4D97-AF65-F5344CB8AC3E}">
+        <p14:creationId xmlns:p14="http://schemas.microsoft.com/office/powerpoint/2010/main" val="769192809"/>
+      </p:ext>
+    </p:extLst>
+  </p:cSld>
+  <p:clrMapOvr>
+    <a:masterClrMapping/>
+  </p:clrMapOvr>
+  <p:timing>
+    <p:tnLst>
+      <p:par>
+        <p:cTn id="1" dur="indefinite" restart="never" nodeType="tmRoot"/>
+      </p:par>
+    </p:tnLst>
+  </p:timing>
+</p:sld>
+</file>
+
+<file path=ppt/slides/slide27.xml><?xml version="1.0" encoding="utf-8"?>
+<p:sld xmlns:a="http://schemas.openxmlformats.org/drawingml/2006/main" xmlns:r="http://schemas.openxmlformats.org/officeDocument/2006/relationships" xmlns:p="http://schemas.openxmlformats.org/presentationml/2006/main">
+  <p:cSld>
+    <p:spTree>
+      <p:nvGrpSpPr>
+        <p:cNvPr id="1" name=""/>
+        <p:cNvGrpSpPr/>
+        <p:nvPr/>
+      </p:nvGrpSpPr>
+      <p:grpSpPr>
+        <a:xfrm>
+          <a:off x="0" y="0"/>
+          <a:ext cx="0" cy="0"/>
+          <a:chOff x="0" y="0"/>
+          <a:chExt cx="0" cy="0"/>
+        </a:xfrm>
+      </p:grpSpPr>
+      <p:sp>
+        <p:nvSpPr>
+          <p:cNvPr id="2" name="Заголовок 1"/>
+          <p:cNvSpPr>
+            <a:spLocks noGrp="1"/>
+          </p:cNvSpPr>
+          <p:nvPr>
+            <p:ph type="title"/>
+          </p:nvPr>
+        </p:nvSpPr>
+        <p:spPr/>
+        <p:txBody>
+          <a:bodyPr/>
+          <a:lstStyle/>
+          <a:p>
+            <a:r>
+              <a:rPr lang="ru-RU" dirty="0" smtClean="0"/>
+              <a:t>Как тестировать результаты исследований с </a:t>
+            </a:r>
+            <a:r>
+              <a:rPr lang="ru-RU" dirty="0" err="1" smtClean="0"/>
+              <a:t>ии</a:t>
+            </a:r>
+            <a:endParaRPr lang="ru-RU" dirty="0"/>
+          </a:p>
+        </p:txBody>
+      </p:sp>
+      <p:sp>
+        <p:nvSpPr>
+          <p:cNvPr id="3" name="Объект 2"/>
+          <p:cNvSpPr>
+            <a:spLocks noGrp="1"/>
+          </p:cNvSpPr>
+          <p:nvPr>
+            <p:ph idx="1"/>
+          </p:nvPr>
+        </p:nvSpPr>
+        <p:spPr/>
+        <p:txBody>
+          <a:bodyPr/>
+          <a:lstStyle/>
+          <a:p>
+            <a:endParaRPr lang="ru-RU"/>
+          </a:p>
+        </p:txBody>
+      </p:sp>
+    </p:spTree>
+    <p:extLst>
+      <p:ext uri="{BB962C8B-B14F-4D97-AF65-F5344CB8AC3E}">
+        <p14:creationId xmlns:p14="http://schemas.microsoft.com/office/powerpoint/2010/main" val="470611769"/>
+      </p:ext>
+    </p:extLst>
+  </p:cSld>
+  <p:clrMapOvr>
+    <a:masterClrMapping/>
+  </p:clrMapOvr>
+  <p:timing>
+    <p:tnLst>
+      <p:par>
+        <p:cTn id="1" dur="indefinite" restart="never" nodeType="tmRoot"/>
+      </p:par>
+    </p:tnLst>
+  </p:timing>
+</p:sld>
+</file>
+
+<file path=ppt/slides/slide28.xml><?xml version="1.0" encoding="utf-8"?>
+<p:sld xmlns:a="http://schemas.openxmlformats.org/drawingml/2006/main" xmlns:r="http://schemas.openxmlformats.org/officeDocument/2006/relationships" xmlns:p="http://schemas.openxmlformats.org/presentationml/2006/main">
+  <p:cSld>
+    <p:spTree>
+      <p:nvGrpSpPr>
+        <p:cNvPr id="1" name=""/>
+        <p:cNvGrpSpPr/>
+        <p:nvPr/>
+      </p:nvGrpSpPr>
+      <p:grpSpPr>
+        <a:xfrm>
+          <a:off x="0" y="0"/>
+          <a:ext cx="0" cy="0"/>
+          <a:chOff x="0" y="0"/>
+          <a:chExt cx="0" cy="0"/>
+        </a:xfrm>
+      </p:grpSpPr>
+      <p:sp>
+        <p:nvSpPr>
+          <p:cNvPr id="2" name="Заголовок 1"/>
+          <p:cNvSpPr>
+            <a:spLocks noGrp="1"/>
+          </p:cNvSpPr>
+          <p:nvPr>
+            <p:ph type="title"/>
+          </p:nvPr>
+        </p:nvSpPr>
+        <p:spPr/>
+        <p:txBody>
+          <a:bodyPr/>
+          <a:lstStyle/>
+          <a:p>
+            <a:r>
+              <a:rPr lang="ru-RU" dirty="0" smtClean="0"/>
+              <a:t>Как составить отчет с </a:t>
+            </a:r>
+            <a:r>
+              <a:rPr lang="ru-RU" dirty="0" err="1" smtClean="0"/>
+              <a:t>ии</a:t>
+            </a:r>
+            <a:endParaRPr lang="ru-RU" dirty="0"/>
+          </a:p>
+        </p:txBody>
+      </p:sp>
+      <p:sp>
+        <p:nvSpPr>
+          <p:cNvPr id="3" name="Объект 2"/>
+          <p:cNvSpPr>
+            <a:spLocks noGrp="1"/>
+          </p:cNvSpPr>
+          <p:nvPr>
+            <p:ph idx="1"/>
+          </p:nvPr>
+        </p:nvSpPr>
+        <p:spPr/>
+        <p:txBody>
+          <a:bodyPr/>
+          <a:lstStyle/>
+          <a:p>
+            <a:endParaRPr lang="ru-RU"/>
+          </a:p>
+        </p:txBody>
+      </p:sp>
+    </p:spTree>
+    <p:extLst>
+      <p:ext uri="{BB962C8B-B14F-4D97-AF65-F5344CB8AC3E}">
+        <p14:creationId xmlns:p14="http://schemas.microsoft.com/office/powerpoint/2010/main" val="3015810689"/>
+      </p:ext>
+    </p:extLst>
+  </p:cSld>
+  <p:clrMapOvr>
+    <a:masterClrMapping/>
+  </p:clrMapOvr>
+  <p:timing>
+    <p:tnLst>
+      <p:par>
+        <p:cTn id="1" dur="indefinite" restart="never" nodeType="tmRoot"/>
+      </p:par>
+    </p:tnLst>
+  </p:timing>
+</p:sld>
+</file>
+
+<file path=ppt/slides/slide29.xml><?xml version="1.0" encoding="utf-8"?>
+<p:sld xmlns:a="http://schemas.openxmlformats.org/drawingml/2006/main" xmlns:r="http://schemas.openxmlformats.org/officeDocument/2006/relationships" xmlns:p="http://schemas.openxmlformats.org/presentationml/2006/main">
+  <p:cSld>
+    <p:spTree>
+      <p:nvGrpSpPr>
+        <p:cNvPr id="1" name=""/>
+        <p:cNvGrpSpPr/>
+        <p:nvPr/>
+      </p:nvGrpSpPr>
+      <p:grpSpPr>
+        <a:xfrm>
+          <a:off x="0" y="0"/>
+          <a:ext cx="0" cy="0"/>
+          <a:chOff x="0" y="0"/>
+          <a:chExt cx="0" cy="0"/>
+        </a:xfrm>
+      </p:grpSpPr>
+      <p:sp>
+        <p:nvSpPr>
+          <p:cNvPr id="2" name="Заголовок 1"/>
+          <p:cNvSpPr>
+            <a:spLocks noGrp="1"/>
+          </p:cNvSpPr>
+          <p:nvPr>
+            <p:ph type="title"/>
+          </p:nvPr>
+        </p:nvSpPr>
+        <p:spPr/>
+        <p:txBody>
+          <a:bodyPr/>
+          <a:lstStyle/>
+          <a:p>
+            <a:r>
+              <a:rPr lang="ru-RU" dirty="0" smtClean="0"/>
+              <a:t>Поиск литературы с </a:t>
+            </a:r>
+            <a:r>
+              <a:rPr lang="ru-RU" dirty="0" err="1" smtClean="0"/>
+              <a:t>ии</a:t>
+            </a:r>
+            <a:endParaRPr lang="ru-RU" dirty="0"/>
+          </a:p>
+        </p:txBody>
+      </p:sp>
+      <p:sp>
+        <p:nvSpPr>
+          <p:cNvPr id="3" name="Объект 2"/>
+          <p:cNvSpPr>
+            <a:spLocks noGrp="1"/>
+          </p:cNvSpPr>
+          <p:nvPr>
+            <p:ph idx="1"/>
+          </p:nvPr>
+        </p:nvSpPr>
+        <p:spPr/>
+        <p:txBody>
+          <a:bodyPr/>
+          <a:lstStyle/>
+          <a:p>
+            <a:endParaRPr lang="ru-RU"/>
+          </a:p>
+        </p:txBody>
+      </p:sp>
+    </p:spTree>
+    <p:extLst>
+      <p:ext uri="{BB962C8B-B14F-4D97-AF65-F5344CB8AC3E}">
+        <p14:creationId xmlns:p14="http://schemas.microsoft.com/office/powerpoint/2010/main" val="565547423"/>
+      </p:ext>
+    </p:extLst>
+  </p:cSld>
+  <p:clrMapOvr>
+    <a:masterClrMapping/>
+  </p:clrMapOvr>
+  <p:timing>
+    <p:tnLst>
+      <p:par>
+        <p:cTn id="1" dur="indefinite" restart="never" nodeType="tmRoot"/>
+      </p:par>
+    </p:tnLst>
+  </p:timing>
+</p:sld>
+</file>
+
 <file path=ppt/slides/slide3.xml><?xml version="1.0" encoding="utf-8"?>
 <p:sld xmlns:a="http://schemas.openxmlformats.org/drawingml/2006/main" xmlns:r="http://schemas.openxmlformats.org/officeDocument/2006/relationships" xmlns:p="http://schemas.openxmlformats.org/presentationml/2006/main">
   <p:cSld>
@@ -4113,11 +5398,7 @@
           <a:p>
             <a:r>
               <a:rPr lang="ru-RU" dirty="0" smtClean="0"/>
-              <a:t>Стадии работы с ген </a:t>
-            </a:r>
-            <a:r>
-              <a:rPr lang="ru-RU" dirty="0" err="1" smtClean="0"/>
-              <a:t>ии</a:t>
+              <a:t>Стадии работы с агентами</a:t>
             </a:r>
             <a:endParaRPr lang="ru-RU" dirty="0"/>
           </a:p>
@@ -4255,6 +5536,117 @@
     <p:extLst>
       <p:ext uri="{BB962C8B-B14F-4D97-AF65-F5344CB8AC3E}">
         <p14:creationId xmlns:p14="http://schemas.microsoft.com/office/powerpoint/2010/main" val="167831127"/>
+      </p:ext>
+    </p:extLst>
+  </p:cSld>
+  <p:clrMapOvr>
+    <a:masterClrMapping/>
+  </p:clrMapOvr>
+  <p:timing>
+    <p:tnLst>
+      <p:par>
+        <p:cTn id="1" dur="indefinite" restart="never" nodeType="tmRoot"/>
+      </p:par>
+    </p:tnLst>
+  </p:timing>
+</p:sld>
+</file>
+
+<file path=ppt/slides/slide30.xml><?xml version="1.0" encoding="utf-8"?>
+<p:sld xmlns:a="http://schemas.openxmlformats.org/drawingml/2006/main" xmlns:r="http://schemas.openxmlformats.org/officeDocument/2006/relationships" xmlns:p="http://schemas.openxmlformats.org/presentationml/2006/main">
+  <p:cSld>
+    <p:spTree>
+      <p:nvGrpSpPr>
+        <p:cNvPr id="1" name=""/>
+        <p:cNvGrpSpPr/>
+        <p:nvPr/>
+      </p:nvGrpSpPr>
+      <p:grpSpPr>
+        <a:xfrm>
+          <a:off x="0" y="0"/>
+          <a:ext cx="0" cy="0"/>
+          <a:chOff x="0" y="0"/>
+          <a:chExt cx="0" cy="0"/>
+        </a:xfrm>
+      </p:grpSpPr>
+      <p:sp>
+        <p:nvSpPr>
+          <p:cNvPr id="2" name="Заголовок 1"/>
+          <p:cNvSpPr>
+            <a:spLocks noGrp="1"/>
+          </p:cNvSpPr>
+          <p:nvPr>
+            <p:ph type="title"/>
+          </p:nvPr>
+        </p:nvSpPr>
+        <p:spPr>
+          <a:xfrm>
+            <a:off x="381000" y="365125"/>
+            <a:ext cx="10972800" cy="892175"/>
+          </a:xfrm>
+        </p:spPr>
+        <p:txBody>
+          <a:bodyPr/>
+          <a:lstStyle/>
+          <a:p>
+            <a:r>
+              <a:rPr lang="ru-RU" dirty="0" smtClean="0"/>
+              <a:t>Советы </a:t>
+            </a:r>
+            <a:endParaRPr lang="ru-RU" dirty="0"/>
+          </a:p>
+        </p:txBody>
+      </p:sp>
+      <p:sp>
+        <p:nvSpPr>
+          <p:cNvPr id="3" name="Объект 2"/>
+          <p:cNvSpPr>
+            <a:spLocks noGrp="1"/>
+          </p:cNvSpPr>
+          <p:nvPr>
+            <p:ph idx="1"/>
+          </p:nvPr>
+        </p:nvSpPr>
+        <p:spPr>
+          <a:xfrm>
+            <a:off x="381000" y="1257300"/>
+            <a:ext cx="10515600" cy="4351338"/>
+          </a:xfrm>
+        </p:spPr>
+        <p:txBody>
+          <a:bodyPr/>
+          <a:lstStyle/>
+          <a:p>
+            <a:r>
+              <a:rPr lang="ru-RU" dirty="0" smtClean="0"/>
+              <a:t>Следует тратить 20% времени на исследования и </a:t>
+            </a:r>
+            <a:r>
+              <a:rPr lang="ru-RU" dirty="0" err="1" smtClean="0"/>
+              <a:t>кодинг</a:t>
+            </a:r>
+            <a:r>
+              <a:rPr lang="ru-RU" dirty="0" smtClean="0"/>
+              <a:t> самостоятельно </a:t>
+            </a:r>
+          </a:p>
+          <a:p>
+            <a:r>
+              <a:rPr lang="ru-RU" dirty="0" smtClean="0"/>
+              <a:t>Важна </a:t>
+            </a:r>
+            <a:r>
+              <a:rPr lang="ru-RU" dirty="0" err="1" smtClean="0"/>
+              <a:t>насмотренность</a:t>
+            </a:r>
+            <a:endParaRPr lang="ru-RU" dirty="0"/>
+          </a:p>
+        </p:txBody>
+      </p:sp>
+    </p:spTree>
+    <p:extLst>
+      <p:ext uri="{BB962C8B-B14F-4D97-AF65-F5344CB8AC3E}">
+        <p14:creationId xmlns:p14="http://schemas.microsoft.com/office/powerpoint/2010/main" val="1427291924"/>
       </p:ext>
     </p:extLst>
   </p:cSld>
@@ -4298,47 +5690,46 @@
             <p:ph type="title"/>
           </p:nvPr>
         </p:nvSpPr>
-        <p:spPr/>
-        <p:txBody>
-          <a:bodyPr/>
-          <a:lstStyle/>
-          <a:p>
-            <a:r>
-              <a:rPr lang="en-US" dirty="0" smtClean="0"/>
-              <a:t>Prompt engineering</a:t>
-            </a:r>
-            <a:endParaRPr lang="ru-RU" dirty="0"/>
-          </a:p>
-        </p:txBody>
-      </p:sp>
-      <p:sp>
-        <p:nvSpPr>
-          <p:cNvPr id="3" name="Объект 2"/>
-          <p:cNvSpPr>
-            <a:spLocks noGrp="1"/>
-          </p:cNvSpPr>
-          <p:nvPr>
-            <p:ph idx="1"/>
-          </p:nvPr>
-        </p:nvSpPr>
         <p:spPr>
           <a:xfrm>
-            <a:off x="596900" y="1558925"/>
+            <a:off x="304800" y="365126"/>
+            <a:ext cx="11049000" cy="730250"/>
+          </a:xfrm>
+        </p:spPr>
+        <p:txBody>
+          <a:bodyPr/>
+          <a:lstStyle/>
+          <a:p>
+            <a:r>
+              <a:rPr lang="ru-RU" dirty="0" smtClean="0"/>
+              <a:t>Определение и свойства агентов</a:t>
+            </a:r>
+            <a:endParaRPr lang="ru-RU" dirty="0"/>
+          </a:p>
+        </p:txBody>
+      </p:sp>
+      <p:sp>
+        <p:nvSpPr>
+          <p:cNvPr id="3" name="Объект 2"/>
+          <p:cNvSpPr>
+            <a:spLocks noGrp="1"/>
+          </p:cNvSpPr>
+          <p:nvPr>
+            <p:ph idx="1"/>
+          </p:nvPr>
+        </p:nvSpPr>
+        <p:spPr>
+          <a:xfrm>
+            <a:off x="571500" y="1377950"/>
             <a:ext cx="10515600" cy="4351338"/>
           </a:xfrm>
         </p:spPr>
         <p:txBody>
-          <a:bodyPr/>
-          <a:lstStyle/>
-          <a:p>
-            <a:r>
-              <a:rPr lang="ru-RU" dirty="0" smtClean="0"/>
-              <a:t>Чем более четко и подробно написали что надо тем </a:t>
-            </a:r>
-            <a:r>
-              <a:rPr lang="ru-RU" dirty="0" err="1" smtClean="0"/>
-              <a:t>лучшк</a:t>
-            </a:r>
+          <a:bodyPr>
+            <a:normAutofit/>
+          </a:bodyPr>
+          <a:lstStyle/>
+          <a:p>
             <a:endParaRPr lang="ru-RU" dirty="0"/>
           </a:p>
         </p:txBody>
@@ -4346,7 +5737,7 @@
     </p:spTree>
     <p:extLst>
       <p:ext uri="{BB962C8B-B14F-4D97-AF65-F5344CB8AC3E}">
-        <p14:creationId xmlns:p14="http://schemas.microsoft.com/office/powerpoint/2010/main" val="4223714898"/>
+        <p14:creationId xmlns:p14="http://schemas.microsoft.com/office/powerpoint/2010/main" val="2392644868"/>
       </p:ext>
     </p:extLst>
   </p:cSld>
@@ -4390,36 +5781,10 @@
             <p:ph type="title"/>
           </p:nvPr>
         </p:nvSpPr>
-        <p:spPr/>
-        <p:txBody>
-          <a:bodyPr/>
-          <a:lstStyle/>
-          <a:p>
-            <a:r>
-              <a:rPr lang="en-US" dirty="0" smtClean="0"/>
-              <a:t>Context engineering</a:t>
-            </a:r>
-            <a:br>
-              <a:rPr lang="en-US" dirty="0" smtClean="0"/>
-            </a:br>
-            <a:endParaRPr lang="ru-RU" dirty="0"/>
-          </a:p>
-        </p:txBody>
-      </p:sp>
-      <p:sp>
-        <p:nvSpPr>
-          <p:cNvPr id="3" name="Объект 2"/>
-          <p:cNvSpPr>
-            <a:spLocks noGrp="1"/>
-          </p:cNvSpPr>
-          <p:nvPr>
-            <p:ph idx="1"/>
-          </p:nvPr>
-        </p:nvSpPr>
         <p:spPr>
           <a:xfrm>
-            <a:off x="571500" y="1368425"/>
-            <a:ext cx="11334750" cy="5137150"/>
+            <a:off x="304800" y="365126"/>
+            <a:ext cx="11049000" cy="730250"/>
           </a:xfrm>
         </p:spPr>
         <p:txBody>
@@ -4428,35 +5793,33 @@
           <a:p>
             <a:r>
               <a:rPr lang="ru-RU" dirty="0" smtClean="0"/>
-              <a:t>Контекст обычно до 1 млн. </a:t>
-            </a:r>
-            <a:r>
-              <a:rPr lang="ru-RU" dirty="0" err="1" smtClean="0"/>
-              <a:t>токенов</a:t>
-            </a:r>
-            <a:r>
-              <a:rPr lang="ru-RU" dirty="0" smtClean="0"/>
-              <a:t>.</a:t>
-            </a:r>
-          </a:p>
-          <a:p>
-            <a:r>
-              <a:rPr lang="ru-RU" dirty="0" smtClean="0"/>
-              <a:t>Чем больше контекста тем хуже обработает</a:t>
-            </a:r>
-          </a:p>
-          <a:p>
-            <a:r>
-              <a:rPr lang="ru-RU" dirty="0" smtClean="0"/>
-              <a:t>Нужно достичь максимальной плотности контекста</a:t>
-            </a:r>
-          </a:p>
-          <a:p>
-            <a:r>
-              <a:rPr lang="ru-RU" dirty="0" smtClean="0"/>
-              <a:t>Нужно уметь ставить и декомпозировать задачи под тот размер, с которым ИИ справится.</a:t>
-            </a:r>
-          </a:p>
+              <a:t>Архитектуры агатных систем</a:t>
+            </a:r>
+            <a:endParaRPr lang="ru-RU" dirty="0"/>
+          </a:p>
+        </p:txBody>
+      </p:sp>
+      <p:sp>
+        <p:nvSpPr>
+          <p:cNvPr id="3" name="Объект 2"/>
+          <p:cNvSpPr>
+            <a:spLocks noGrp="1"/>
+          </p:cNvSpPr>
+          <p:nvPr>
+            <p:ph idx="1"/>
+          </p:nvPr>
+        </p:nvSpPr>
+        <p:spPr>
+          <a:xfrm>
+            <a:off x="571500" y="1377950"/>
+            <a:ext cx="10515600" cy="4351338"/>
+          </a:xfrm>
+        </p:spPr>
+        <p:txBody>
+          <a:bodyPr>
+            <a:normAutofit/>
+          </a:bodyPr>
+          <a:lstStyle/>
           <a:p>
             <a:endParaRPr lang="ru-RU" dirty="0"/>
           </a:p>
@@ -4465,7 +5828,7 @@
     </p:spTree>
     <p:extLst>
       <p:ext uri="{BB962C8B-B14F-4D97-AF65-F5344CB8AC3E}">
-        <p14:creationId xmlns:p14="http://schemas.microsoft.com/office/powerpoint/2010/main" val="3629836033"/>
+        <p14:creationId xmlns:p14="http://schemas.microsoft.com/office/powerpoint/2010/main" val="2735175627"/>
       </p:ext>
     </p:extLst>
   </p:cSld>
@@ -4511,8 +5874,8 @@
         </p:nvSpPr>
         <p:spPr>
           <a:xfrm>
-            <a:off x="361950" y="365126"/>
-            <a:ext cx="10991850" cy="749300"/>
+            <a:off x="304800" y="365126"/>
+            <a:ext cx="11049000" cy="730250"/>
           </a:xfrm>
         </p:spPr>
         <p:txBody>
@@ -4521,7 +5884,7 @@
           <a:p>
             <a:r>
               <a:rPr lang="ru-RU" dirty="0" smtClean="0"/>
-              <a:t>Разработка через спецификацию</a:t>
+              <a:t>Виды агентов</a:t>
             </a:r>
             <a:endParaRPr lang="ru-RU" dirty="0"/>
           </a:p>
@@ -4539,12 +5902,14 @@
         </p:nvSpPr>
         <p:spPr>
           <a:xfrm>
-            <a:off x="361949" y="1216025"/>
-            <a:ext cx="11534775" cy="5346700"/>
+            <a:off x="571500" y="1377950"/>
+            <a:ext cx="10515600" cy="4351338"/>
           </a:xfrm>
         </p:spPr>
         <p:txBody>
-          <a:bodyPr/>
+          <a:bodyPr>
+            <a:normAutofit/>
+          </a:bodyPr>
           <a:lstStyle/>
           <a:p>
             <a:endParaRPr lang="ru-RU" dirty="0"/>
@@ -4554,7 +5919,7 @@
     </p:spTree>
     <p:extLst>
       <p:ext uri="{BB962C8B-B14F-4D97-AF65-F5344CB8AC3E}">
-        <p14:creationId xmlns:p14="http://schemas.microsoft.com/office/powerpoint/2010/main" val="2560986178"/>
+        <p14:creationId xmlns:p14="http://schemas.microsoft.com/office/powerpoint/2010/main" val="976333832"/>
       </p:ext>
     </p:extLst>
   </p:cSld>
@@ -4598,19 +5963,14 @@
             <p:ph type="title"/>
           </p:nvPr>
         </p:nvSpPr>
-        <p:spPr>
-          <a:xfrm>
-            <a:off x="838200" y="365126"/>
-            <a:ext cx="10515600" cy="882650"/>
-          </a:xfrm>
-        </p:spPr>
+        <p:spPr/>
         <p:txBody>
           <a:bodyPr/>
           <a:lstStyle/>
           <a:p>
             <a:r>
               <a:rPr lang="ru-RU" dirty="0" smtClean="0"/>
-              <a:t>Разработка на основе тестов в эпоху ИИ</a:t>
+              <a:t>Технический долг систем на каждом этапе</a:t>
             </a:r>
             <a:endParaRPr lang="ru-RU" dirty="0"/>
           </a:p>
@@ -4626,50 +5986,19 @@
             <p:ph idx="1"/>
           </p:nvPr>
         </p:nvSpPr>
-        <p:spPr>
-          <a:xfrm>
-            <a:off x="228599" y="1247776"/>
-            <a:ext cx="11534775" cy="4984750"/>
-          </a:xfrm>
-        </p:spPr>
-        <p:txBody>
-          <a:bodyPr/>
-          <a:lstStyle/>
-          <a:p>
-            <a:r>
-              <a:rPr lang="ru-RU" dirty="0" smtClean="0"/>
-              <a:t>Важны и </a:t>
-            </a:r>
-            <a:r>
-              <a:rPr lang="en-US" dirty="0" smtClean="0"/>
-              <a:t>SDD (specification driven development)</a:t>
-            </a:r>
-          </a:p>
-          <a:p>
-            <a:r>
-              <a:rPr lang="ru-RU" dirty="0" smtClean="0"/>
-              <a:t>И </a:t>
-            </a:r>
-            <a:r>
-              <a:rPr lang="en-US" dirty="0"/>
-              <a:t>(</a:t>
-            </a:r>
-            <a:r>
-              <a:rPr lang="en-US" dirty="0" smtClean="0"/>
-              <a:t>Test driven </a:t>
-            </a:r>
-            <a:r>
-              <a:rPr lang="en-US" dirty="0" smtClean="0"/>
-              <a:t>development)</a:t>
-            </a:r>
-            <a:endParaRPr lang="ru-RU" dirty="0"/>
+        <p:spPr/>
+        <p:txBody>
+          <a:bodyPr/>
+          <a:lstStyle/>
+          <a:p>
+            <a:endParaRPr lang="ru-RU"/>
           </a:p>
         </p:txBody>
       </p:sp>
     </p:spTree>
     <p:extLst>
       <p:ext uri="{BB962C8B-B14F-4D97-AF65-F5344CB8AC3E}">
-        <p14:creationId xmlns:p14="http://schemas.microsoft.com/office/powerpoint/2010/main" val="3642863690"/>
+        <p14:creationId xmlns:p14="http://schemas.microsoft.com/office/powerpoint/2010/main" val="2161719736"/>
       </p:ext>
     </p:extLst>
   </p:cSld>
@@ -4713,53 +6042,46 @@
             <p:ph type="title"/>
           </p:nvPr>
         </p:nvSpPr>
+        <p:spPr/>
+        <p:txBody>
+          <a:bodyPr/>
+          <a:lstStyle/>
+          <a:p>
+            <a:r>
+              <a:rPr lang="en-US" dirty="0" smtClean="0"/>
+              <a:t>Prompt engineering</a:t>
+            </a:r>
+            <a:endParaRPr lang="ru-RU" dirty="0"/>
+          </a:p>
+        </p:txBody>
+      </p:sp>
+      <p:sp>
+        <p:nvSpPr>
+          <p:cNvPr id="3" name="Объект 2"/>
+          <p:cNvSpPr>
+            <a:spLocks noGrp="1"/>
+          </p:cNvSpPr>
+          <p:nvPr>
+            <p:ph idx="1"/>
+          </p:nvPr>
+        </p:nvSpPr>
         <p:spPr>
           <a:xfrm>
-            <a:off x="533400" y="476250"/>
-            <a:ext cx="10515600" cy="673100"/>
+            <a:off x="596900" y="1558925"/>
+            <a:ext cx="10515600" cy="4351338"/>
           </a:xfrm>
         </p:spPr>
         <p:txBody>
-          <a:bodyPr>
-            <a:normAutofit fontScale="90000"/>
-          </a:bodyPr>
-          <a:lstStyle/>
-          <a:p>
+          <a:bodyPr/>
+          <a:lstStyle/>
+          <a:p>
+            <a:r>
+              <a:rPr lang="ru-RU" dirty="0" smtClean="0"/>
+              <a:t>Чем более четко и подробно написали что надо тем </a:t>
+            </a:r>
             <a:r>
               <a:rPr lang="ru-RU" dirty="0" err="1" smtClean="0"/>
-              <a:t>Ревью</a:t>
-            </a:r>
-            <a:r>
-              <a:rPr lang="ru-RU" dirty="0" smtClean="0"/>
-              <a:t> ИИ</a:t>
-            </a:r>
-            <a:endParaRPr lang="ru-RU" dirty="0"/>
-          </a:p>
-        </p:txBody>
-      </p:sp>
-      <p:sp>
-        <p:nvSpPr>
-          <p:cNvPr id="3" name="Объект 2"/>
-          <p:cNvSpPr>
-            <a:spLocks noGrp="1"/>
-          </p:cNvSpPr>
-          <p:nvPr>
-            <p:ph idx="1"/>
-          </p:nvPr>
-        </p:nvSpPr>
-        <p:spPr>
-          <a:xfrm>
-            <a:off x="238125" y="1149350"/>
-            <a:ext cx="11582400" cy="5213350"/>
-          </a:xfrm>
-        </p:spPr>
-        <p:txBody>
-          <a:bodyPr/>
-          <a:lstStyle/>
-          <a:p>
-            <a:r>
-              <a:rPr lang="ru-RU" dirty="0" smtClean="0"/>
-              <a:t>ИИ создает куда больше контента чем человек может отследить</a:t>
+              <a:t>лучшк</a:t>
             </a:r>
             <a:endParaRPr lang="ru-RU" dirty="0"/>
           </a:p>
@@ -4768,7 +6090,7 @@
     </p:spTree>
     <p:extLst>
       <p:ext uri="{BB962C8B-B14F-4D97-AF65-F5344CB8AC3E}">
-        <p14:creationId xmlns:p14="http://schemas.microsoft.com/office/powerpoint/2010/main" val="3055655509"/>
+        <p14:creationId xmlns:p14="http://schemas.microsoft.com/office/powerpoint/2010/main" val="4223714898"/>
       </p:ext>
     </p:extLst>
   </p:cSld>
@@ -4818,31 +6140,67 @@
           <a:lstStyle/>
           <a:p>
             <a:r>
+              <a:rPr lang="en-US" dirty="0" smtClean="0"/>
+              <a:t>Context engineering</a:t>
+            </a:r>
+            <a:br>
+              <a:rPr lang="en-US" dirty="0" smtClean="0"/>
+            </a:br>
+            <a:endParaRPr lang="ru-RU" dirty="0"/>
+          </a:p>
+        </p:txBody>
+      </p:sp>
+      <p:sp>
+        <p:nvSpPr>
+          <p:cNvPr id="3" name="Объект 2"/>
+          <p:cNvSpPr>
+            <a:spLocks noGrp="1"/>
+          </p:cNvSpPr>
+          <p:nvPr>
+            <p:ph idx="1"/>
+          </p:nvPr>
+        </p:nvSpPr>
+        <p:spPr>
+          <a:xfrm>
+            <a:off x="571500" y="1368425"/>
+            <a:ext cx="11334750" cy="5137150"/>
+          </a:xfrm>
+        </p:spPr>
+        <p:txBody>
+          <a:bodyPr/>
+          <a:lstStyle/>
+          <a:p>
+            <a:r>
               <a:rPr lang="ru-RU" dirty="0" smtClean="0"/>
-              <a:t>Как планировать исследование с </a:t>
+              <a:t>Контекст обычно до 1 млн. </a:t>
             </a:r>
             <a:r>
               <a:rPr lang="ru-RU" dirty="0" err="1" smtClean="0"/>
-              <a:t>ии</a:t>
-            </a:r>
-            <a:endParaRPr lang="ru-RU" dirty="0"/>
-          </a:p>
-        </p:txBody>
-      </p:sp>
-      <p:sp>
-        <p:nvSpPr>
-          <p:cNvPr id="3" name="Объект 2"/>
-          <p:cNvSpPr>
-            <a:spLocks noGrp="1"/>
-          </p:cNvSpPr>
-          <p:nvPr>
-            <p:ph idx="1"/>
-          </p:nvPr>
-        </p:nvSpPr>
-        <p:spPr/>
-        <p:txBody>
-          <a:bodyPr/>
-          <a:lstStyle/>
+              <a:t>токенов</a:t>
+            </a:r>
+            <a:r>
+              <a:rPr lang="ru-RU" dirty="0" smtClean="0"/>
+              <a:t>.</a:t>
+            </a:r>
+          </a:p>
+          <a:p>
+            <a:r>
+              <a:rPr lang="ru-RU" dirty="0" smtClean="0"/>
+              <a:t>Чем больше контекста тем хуже обработает</a:t>
+            </a:r>
+          </a:p>
+          <a:p>
+            <a:r>
+              <a:rPr lang="ru-RU" dirty="0" smtClean="0"/>
+              <a:t>Нужно достичь максимальной плотности контекста</a:t>
+            </a:r>
+          </a:p>
+          <a:p>
+            <a:r>
+              <a:rPr lang="ru-RU" dirty="0" smtClean="0"/>
+              <a:t>Нужно уметь ставить и декомпозировать задачи под тот размер, с которым ИИ справится.</a:t>
+            </a:r>
+          </a:p>
           <a:p>
             <a:endParaRPr lang="ru-RU" dirty="0"/>
           </a:p>
@@ -4851,7 +6209,7 @@
     </p:spTree>
     <p:extLst>
       <p:ext uri="{BB962C8B-B14F-4D97-AF65-F5344CB8AC3E}">
-        <p14:creationId xmlns:p14="http://schemas.microsoft.com/office/powerpoint/2010/main" val="548751807"/>
+        <p14:creationId xmlns:p14="http://schemas.microsoft.com/office/powerpoint/2010/main" val="3629836033"/>
       </p:ext>
     </p:extLst>
   </p:cSld>

--- a/2026/agentic work.pptx
+++ b/2026/agentic work.pptx
@@ -5,7 +5,7 @@
     <p:sldMasterId id="2147483648" r:id="rId1"/>
   </p:sldMasterIdLst>
   <p:notesMasterIdLst>
-    <p:notesMasterId r:id="rId32"/>
+    <p:notesMasterId r:id="rId36"/>
   </p:notesMasterIdLst>
   <p:sldIdLst>
     <p:sldId id="256" r:id="rId2"/>
@@ -37,7 +37,11 @@
     <p:sldId id="268" r:id="rId28"/>
     <p:sldId id="269" r:id="rId29"/>
     <p:sldId id="270" r:id="rId30"/>
-    <p:sldId id="264" r:id="rId31"/>
+    <p:sldId id="289" r:id="rId31"/>
+    <p:sldId id="287" r:id="rId32"/>
+    <p:sldId id="288" r:id="rId33"/>
+    <p:sldId id="264" r:id="rId34"/>
+    <p:sldId id="286" r:id="rId35"/>
   </p:sldIdLst>
   <p:sldSz cx="12192000" cy="6858000"/>
   <p:notesSz cx="6858000" cy="9144000"/>
@@ -136,6 +140,11 @@
       </a:defRPr>
     </a:lvl9pPr>
   </p:defaultTextStyle>
+  <p:extLst>
+    <p:ext uri="{EFAFB233-063F-42B5-8137-9DF3F51BA10A}">
+      <p15:sldGuideLst xmlns:p15="http://schemas.microsoft.com/office/powerpoint/2012/main"/>
+    </p:ext>
+  </p:extLst>
 </p:presentation>
 </file>
 
@@ -221,7 +230,7 @@
           <a:p>
             <a:fld id="{A0CE8446-0576-4B63-9413-F778CD76DB1F}" type="datetimeFigureOut">
               <a:rPr lang="ru-RU" smtClean="0"/>
-              <a:t>09.09.2026</a:t>
+              <a:t>16.09.2026</a:t>
             </a:fld>
             <a:endParaRPr lang="ru-RU"/>
           </a:p>
@@ -704,7 +713,7 @@
           <a:p>
             <a:fld id="{20450CC9-7C26-4C4A-BCDA-DD588C648A6C}" type="datetimeFigureOut">
               <a:rPr lang="ru-RU" smtClean="0"/>
-              <a:t>09.09.2026</a:t>
+              <a:t>16.09.2026</a:t>
             </a:fld>
             <a:endParaRPr lang="ru-RU"/>
           </a:p>
@@ -874,7 +883,7 @@
           <a:p>
             <a:fld id="{20450CC9-7C26-4C4A-BCDA-DD588C648A6C}" type="datetimeFigureOut">
               <a:rPr lang="ru-RU" smtClean="0"/>
-              <a:t>09.09.2026</a:t>
+              <a:t>16.09.2026</a:t>
             </a:fld>
             <a:endParaRPr lang="ru-RU"/>
           </a:p>
@@ -1054,7 +1063,7 @@
           <a:p>
             <a:fld id="{20450CC9-7C26-4C4A-BCDA-DD588C648A6C}" type="datetimeFigureOut">
               <a:rPr lang="ru-RU" smtClean="0"/>
-              <a:t>09.09.2026</a:t>
+              <a:t>16.09.2026</a:t>
             </a:fld>
             <a:endParaRPr lang="ru-RU"/>
           </a:p>
@@ -1224,7 +1233,7 @@
           <a:p>
             <a:fld id="{20450CC9-7C26-4C4A-BCDA-DD588C648A6C}" type="datetimeFigureOut">
               <a:rPr lang="ru-RU" smtClean="0"/>
-              <a:t>09.09.2026</a:t>
+              <a:t>16.09.2026</a:t>
             </a:fld>
             <a:endParaRPr lang="ru-RU"/>
           </a:p>
@@ -1470,7 +1479,7 @@
           <a:p>
             <a:fld id="{20450CC9-7C26-4C4A-BCDA-DD588C648A6C}" type="datetimeFigureOut">
               <a:rPr lang="ru-RU" smtClean="0"/>
-              <a:t>09.09.2026</a:t>
+              <a:t>16.09.2026</a:t>
             </a:fld>
             <a:endParaRPr lang="ru-RU"/>
           </a:p>
@@ -1702,7 +1711,7 @@
           <a:p>
             <a:fld id="{20450CC9-7C26-4C4A-BCDA-DD588C648A6C}" type="datetimeFigureOut">
               <a:rPr lang="ru-RU" smtClean="0"/>
-              <a:t>09.09.2026</a:t>
+              <a:t>16.09.2026</a:t>
             </a:fld>
             <a:endParaRPr lang="ru-RU"/>
           </a:p>
@@ -2069,7 +2078,7 @@
           <a:p>
             <a:fld id="{20450CC9-7C26-4C4A-BCDA-DD588C648A6C}" type="datetimeFigureOut">
               <a:rPr lang="ru-RU" smtClean="0"/>
-              <a:t>09.09.2026</a:t>
+              <a:t>16.09.2026</a:t>
             </a:fld>
             <a:endParaRPr lang="ru-RU"/>
           </a:p>
@@ -2187,7 +2196,7 @@
           <a:p>
             <a:fld id="{20450CC9-7C26-4C4A-BCDA-DD588C648A6C}" type="datetimeFigureOut">
               <a:rPr lang="ru-RU" smtClean="0"/>
-              <a:t>09.09.2026</a:t>
+              <a:t>16.09.2026</a:t>
             </a:fld>
             <a:endParaRPr lang="ru-RU"/>
           </a:p>
@@ -2282,7 +2291,7 @@
           <a:p>
             <a:fld id="{20450CC9-7C26-4C4A-BCDA-DD588C648A6C}" type="datetimeFigureOut">
               <a:rPr lang="ru-RU" smtClean="0"/>
-              <a:t>09.09.2026</a:t>
+              <a:t>16.09.2026</a:t>
             </a:fld>
             <a:endParaRPr lang="ru-RU"/>
           </a:p>
@@ -2559,7 +2568,7 @@
           <a:p>
             <a:fld id="{20450CC9-7C26-4C4A-BCDA-DD588C648A6C}" type="datetimeFigureOut">
               <a:rPr lang="ru-RU" smtClean="0"/>
-              <a:t>09.09.2026</a:t>
+              <a:t>16.09.2026</a:t>
             </a:fld>
             <a:endParaRPr lang="ru-RU"/>
           </a:p>
@@ -2812,7 +2821,7 @@
           <a:p>
             <a:fld id="{20450CC9-7C26-4C4A-BCDA-DD588C648A6C}" type="datetimeFigureOut">
               <a:rPr lang="ru-RU" smtClean="0"/>
-              <a:t>09.09.2026</a:t>
+              <a:t>16.09.2026</a:t>
             </a:fld>
             <a:endParaRPr lang="ru-RU"/>
           </a:p>
@@ -3025,7 +3034,7 @@
           <a:p>
             <a:fld id="{20450CC9-7C26-4C4A-BCDA-DD588C648A6C}" type="datetimeFigureOut">
               <a:rPr lang="ru-RU" smtClean="0"/>
-              <a:t>09.09.2026</a:t>
+              <a:t>16.09.2026</a:t>
             </a:fld>
             <a:endParaRPr lang="ru-RU"/>
           </a:p>
@@ -3468,7 +3477,13 @@
           <a:bodyPr/>
           <a:lstStyle/>
           <a:p>
-            <a:endParaRPr lang="ru-RU"/>
+            <a:r>
+              <a:rPr lang="ru-RU" dirty="0" smtClean="0"/>
+              <a:t>Нужно переписать так чтобы это простой и практически полезной презентацией с которой можно сделать практику и получить новые знания для студентов</a:t>
+            </a:r>
+          </a:p>
+          <a:p>
+            <a:endParaRPr lang="ru-RU" dirty="0"/>
           </a:p>
         </p:txBody>
       </p:sp>
@@ -3624,11 +3639,7 @@
           <a:p>
             <a:r>
               <a:rPr lang="en-US" dirty="0" smtClean="0"/>
-              <a:t>loop</a:t>
-            </a:r>
-            <a:r>
-              <a:rPr lang="en-US" dirty="0" smtClean="0"/>
-              <a:t> engineering</a:t>
+              <a:t>loop engineering</a:t>
             </a:r>
             <a:br>
               <a:rPr lang="en-US" dirty="0" smtClean="0"/>
@@ -4732,11 +4743,7 @@
             </a:r>
             <a:r>
               <a:rPr lang="en-US" dirty="0" smtClean="0"/>
-              <a:t>Test driven </a:t>
-            </a:r>
-            <a:r>
-              <a:rPr lang="en-US" dirty="0" smtClean="0"/>
-              <a:t>development)</a:t>
+              <a:t>Test driven development)</a:t>
             </a:r>
             <a:endParaRPr lang="ru-RU" dirty="0"/>
           </a:p>
@@ -5470,55 +5477,43 @@
           <a:p>
             <a:r>
               <a:rPr lang="en-US" dirty="0" smtClean="0"/>
-              <a:t>Context </a:t>
-            </a:r>
+              <a:t>Context engineering</a:t>
+            </a:r>
+          </a:p>
+          <a:p>
+            <a:pPr lvl="1"/>
+            <a:r>
+              <a:rPr lang="ru-RU" dirty="0" smtClean="0"/>
+              <a:t>Ответ зависит от задачи и от контекста</a:t>
+            </a:r>
+          </a:p>
+          <a:p>
+            <a:pPr lvl="1"/>
+            <a:r>
+              <a:rPr lang="ru-RU" dirty="0" smtClean="0"/>
+              <a:t>Нужна оптимизация контекста по размеру.</a:t>
+            </a:r>
+            <a:endParaRPr lang="en-US" dirty="0" smtClean="0"/>
+          </a:p>
+          <a:p>
             <a:r>
               <a:rPr lang="en-US" dirty="0" smtClean="0"/>
-              <a:t>engineering</a:t>
-            </a:r>
+              <a:t>Harness engineering</a:t>
+            </a:r>
+            <a:endParaRPr lang="ru-RU" dirty="0" smtClean="0"/>
           </a:p>
           <a:p>
             <a:pPr lvl="1"/>
             <a:r>
               <a:rPr lang="ru-RU" dirty="0" smtClean="0"/>
-              <a:t>Ответ зависит от задачи и от контекста</a:t>
-            </a:r>
-          </a:p>
-          <a:p>
-            <a:pPr lvl="1"/>
-            <a:r>
-              <a:rPr lang="ru-RU" dirty="0" smtClean="0"/>
-              <a:t>Нужна оптимизация контекста по размеру.</a:t>
+              <a:t>Задачи могут выполняться итерационно по спецификации, важно в какой среде решается задача</a:t>
             </a:r>
             <a:endParaRPr lang="en-US" dirty="0" smtClean="0"/>
           </a:p>
           <a:p>
             <a:r>
               <a:rPr lang="en-US" dirty="0" smtClean="0"/>
-              <a:t>Harness </a:t>
-            </a:r>
-            <a:r>
-              <a:rPr lang="en-US" dirty="0" smtClean="0"/>
-              <a:t>engineering</a:t>
-            </a:r>
-            <a:endParaRPr lang="ru-RU" dirty="0" smtClean="0"/>
-          </a:p>
-          <a:p>
-            <a:pPr lvl="1"/>
-            <a:r>
-              <a:rPr lang="ru-RU" dirty="0" smtClean="0"/>
-              <a:t>Задачи могут выполняться итерационно по спецификации, важно в какой среде решается задача</a:t>
-            </a:r>
-            <a:endParaRPr lang="en-US" dirty="0" smtClean="0"/>
-          </a:p>
-          <a:p>
-            <a:r>
-              <a:rPr lang="en-US" dirty="0" smtClean="0"/>
-              <a:t>Loop </a:t>
-            </a:r>
-            <a:r>
-              <a:rPr lang="en-US" dirty="0" smtClean="0"/>
-              <a:t>engineering</a:t>
+              <a:t>Loop engineering</a:t>
             </a:r>
             <a:endParaRPr lang="ru-RU" dirty="0" smtClean="0"/>
           </a:p>
@@ -5579,6 +5574,586 @@
             <p:ph type="title"/>
           </p:nvPr>
         </p:nvSpPr>
+        <p:spPr/>
+        <p:txBody>
+          <a:bodyPr/>
+          <a:lstStyle/>
+          <a:p>
+            <a:r>
+              <a:rPr lang="ru-RU" dirty="0" smtClean="0"/>
+              <a:t>подготовка</a:t>
+            </a:r>
+            <a:endParaRPr lang="ru-RU" dirty="0"/>
+          </a:p>
+        </p:txBody>
+      </p:sp>
+      <p:sp>
+        <p:nvSpPr>
+          <p:cNvPr id="3" name="Объект 2"/>
+          <p:cNvSpPr>
+            <a:spLocks noGrp="1"/>
+          </p:cNvSpPr>
+          <p:nvPr>
+            <p:ph idx="1"/>
+          </p:nvPr>
+        </p:nvSpPr>
+        <p:spPr>
+          <a:xfrm>
+            <a:off x="361545" y="1368424"/>
+            <a:ext cx="11272736" cy="4857277"/>
+          </a:xfrm>
+        </p:spPr>
+        <p:txBody>
+          <a:bodyPr>
+            <a:normAutofit fontScale="92500"/>
+          </a:bodyPr>
+          <a:lstStyle/>
+          <a:p>
+            <a:r>
+              <a:rPr lang="ru-RU" dirty="0" smtClean="0"/>
+              <a:t>Нужен </a:t>
+            </a:r>
+            <a:r>
+              <a:rPr lang="ru-RU" dirty="0" err="1" smtClean="0"/>
+              <a:t>минмальный</a:t>
+            </a:r>
+            <a:r>
+              <a:rPr lang="ru-RU" dirty="0" smtClean="0"/>
+              <a:t> словарь терминов и </a:t>
+            </a:r>
+            <a:r>
+              <a:rPr lang="ru-RU" dirty="0" err="1" smtClean="0"/>
+              <a:t>определний</a:t>
+            </a:r>
+            <a:r>
+              <a:rPr lang="ru-RU" dirty="0" smtClean="0"/>
+              <a:t>. Его нужно сравнить с такими же в статьях эталонах. Он должен быть в контексте </a:t>
+            </a:r>
+            <a:r>
+              <a:rPr lang="ru-RU" dirty="0" err="1" smtClean="0"/>
+              <a:t>повтороен</a:t>
+            </a:r>
+            <a:r>
+              <a:rPr lang="ru-RU" dirty="0" smtClean="0"/>
+              <a:t> для усиления значимости.</a:t>
+            </a:r>
+          </a:p>
+          <a:p>
+            <a:r>
+              <a:rPr lang="ru-RU" dirty="0" smtClean="0"/>
+              <a:t>Любой раздел и статья пишутся по схеме от общего к частному. Сначала структура потом тезисы, потом детали. </a:t>
+            </a:r>
+          </a:p>
+          <a:p>
+            <a:r>
+              <a:rPr lang="ru-RU" dirty="0" smtClean="0"/>
+              <a:t>Каждая итерация должна проходить самопроверку на термины, на смыслы. </a:t>
+            </a:r>
+          </a:p>
+          <a:p>
+            <a:r>
+              <a:rPr lang="ru-RU" dirty="0" smtClean="0"/>
+              <a:t>Тезисы от общего к частному логика только в перед.</a:t>
+            </a:r>
+          </a:p>
+          <a:p>
+            <a:r>
+              <a:rPr lang="ru-RU" dirty="0" smtClean="0"/>
+              <a:t>Статья доказывает цель статьи иное не нужно.</a:t>
+            </a:r>
+          </a:p>
+          <a:p>
+            <a:r>
+              <a:rPr lang="ru-RU" dirty="0" smtClean="0"/>
+              <a:t>На каждый тезисы нужны вопросы, следует ли он из предыдущих. Нужна ли ссылка подтверждения из литературы. </a:t>
+            </a:r>
+          </a:p>
+          <a:p>
+            <a:r>
+              <a:rPr lang="ru-RU" dirty="0" smtClean="0"/>
+              <a:t>Прежде чем писать раздел нужно согласовать его </a:t>
+            </a:r>
+            <a:r>
+              <a:rPr lang="ru-RU" smtClean="0"/>
+              <a:t>скелет кратко.</a:t>
+            </a:r>
+            <a:endParaRPr lang="ru-RU" dirty="0"/>
+          </a:p>
+        </p:txBody>
+      </p:sp>
+    </p:spTree>
+    <p:extLst>
+      <p:ext uri="{BB962C8B-B14F-4D97-AF65-F5344CB8AC3E}">
+        <p14:creationId xmlns:p14="http://schemas.microsoft.com/office/powerpoint/2010/main" val="360519476"/>
+      </p:ext>
+    </p:extLst>
+  </p:cSld>
+  <p:clrMapOvr>
+    <a:masterClrMapping/>
+  </p:clrMapOvr>
+  <p:timing>
+    <p:tnLst>
+      <p:par>
+        <p:cTn id="1" dur="indefinite" restart="never" nodeType="tmRoot"/>
+      </p:par>
+    </p:tnLst>
+  </p:timing>
+</p:sld>
+</file>
+
+<file path=ppt/slides/slide31.xml><?xml version="1.0" encoding="utf-8"?>
+<p:sld xmlns:a="http://schemas.openxmlformats.org/drawingml/2006/main" xmlns:r="http://schemas.openxmlformats.org/officeDocument/2006/relationships" xmlns:p="http://schemas.openxmlformats.org/presentationml/2006/main">
+  <p:cSld>
+    <p:spTree>
+      <p:nvGrpSpPr>
+        <p:cNvPr id="1" name=""/>
+        <p:cNvGrpSpPr/>
+        <p:nvPr/>
+      </p:nvGrpSpPr>
+      <p:grpSpPr>
+        <a:xfrm>
+          <a:off x="0" y="0"/>
+          <a:ext cx="0" cy="0"/>
+          <a:chOff x="0" y="0"/>
+          <a:chExt cx="0" cy="0"/>
+        </a:xfrm>
+      </p:grpSpPr>
+      <p:sp>
+        <p:nvSpPr>
+          <p:cNvPr id="2" name="Заголовок 1"/>
+          <p:cNvSpPr>
+            <a:spLocks noGrp="1"/>
+          </p:cNvSpPr>
+          <p:nvPr>
+            <p:ph type="title"/>
+          </p:nvPr>
+        </p:nvSpPr>
+        <p:spPr/>
+        <p:txBody>
+          <a:bodyPr/>
+          <a:lstStyle/>
+          <a:p>
+            <a:r>
+              <a:rPr lang="ru-RU" dirty="0" smtClean="0"/>
+              <a:t>Замечания к введению</a:t>
+            </a:r>
+            <a:endParaRPr lang="ru-RU" dirty="0"/>
+          </a:p>
+        </p:txBody>
+      </p:sp>
+      <p:sp>
+        <p:nvSpPr>
+          <p:cNvPr id="3" name="Объект 2"/>
+          <p:cNvSpPr>
+            <a:spLocks noGrp="1"/>
+          </p:cNvSpPr>
+          <p:nvPr>
+            <p:ph idx="1"/>
+          </p:nvPr>
+        </p:nvSpPr>
+        <p:spPr>
+          <a:xfrm>
+            <a:off x="536643" y="1418314"/>
+            <a:ext cx="10515600" cy="5167312"/>
+          </a:xfrm>
+        </p:spPr>
+        <p:txBody>
+          <a:bodyPr>
+            <a:normAutofit fontScale="77500" lnSpcReduction="20000"/>
+          </a:bodyPr>
+          <a:lstStyle/>
+          <a:p>
+            <a:r>
+              <a:rPr lang="ru-RU" dirty="0"/>
+              <a:t>мы идем от общего к частному.</a:t>
+            </a:r>
+          </a:p>
+          <a:p>
+            <a:r>
+              <a:rPr lang="ru-RU" dirty="0" smtClean="0"/>
+              <a:t>Не даем ссылок вперед только на то что сказано выше </a:t>
+            </a:r>
+            <a:endParaRPr lang="ru-RU" dirty="0"/>
+          </a:p>
+          <a:p>
+            <a:r>
+              <a:rPr lang="ru-RU" dirty="0" smtClean="0"/>
+              <a:t>Если написали правило надо спросить как он его понял.</a:t>
+            </a:r>
+          </a:p>
+          <a:p>
+            <a:r>
+              <a:rPr lang="ru-RU" dirty="0" smtClean="0"/>
+              <a:t>Если есть желание </a:t>
+            </a:r>
+            <a:r>
+              <a:rPr lang="ru-RU" dirty="0" err="1" smtClean="0"/>
+              <a:t>сформулироать</a:t>
+            </a:r>
+            <a:r>
+              <a:rPr lang="ru-RU" dirty="0" smtClean="0"/>
+              <a:t> общий вывод, то частное это пример.</a:t>
+            </a:r>
+          </a:p>
+          <a:p>
+            <a:r>
+              <a:rPr lang="ru-RU" dirty="0" smtClean="0"/>
+              <a:t>Нельзя путать </a:t>
+            </a:r>
+            <a:r>
+              <a:rPr lang="ru-RU" dirty="0" err="1" smtClean="0"/>
+              <a:t>объектность</a:t>
+            </a:r>
+            <a:r>
+              <a:rPr lang="ru-RU" dirty="0" smtClean="0"/>
+              <a:t> и </a:t>
+            </a:r>
+            <a:r>
+              <a:rPr lang="ru-RU" dirty="0" err="1" smtClean="0"/>
+              <a:t>субъектность</a:t>
+            </a:r>
+            <a:r>
+              <a:rPr lang="ru-RU" dirty="0" smtClean="0"/>
+              <a:t> сказуемого. Если это поломка то ЕЕ чинят, если это оптимизация режимов работы, то ОНА приводит.</a:t>
+            </a:r>
+          </a:p>
+          <a:p>
+            <a:r>
+              <a:rPr lang="ru-RU" dirty="0" smtClean="0"/>
+              <a:t>Нужны общие примеры.</a:t>
+            </a:r>
+          </a:p>
+          <a:p>
+            <a:r>
+              <a:rPr lang="ru-RU" dirty="0" smtClean="0"/>
+              <a:t>Следовать лучше логики эталонных </a:t>
+            </a:r>
+            <a:r>
+              <a:rPr lang="ru-RU" dirty="0" err="1" smtClean="0"/>
+              <a:t>примекров</a:t>
+            </a:r>
+            <a:r>
+              <a:rPr lang="ru-RU" dirty="0" smtClean="0"/>
+              <a:t>.</a:t>
+            </a:r>
+          </a:p>
+          <a:p>
+            <a:r>
+              <a:rPr lang="ru-RU" dirty="0" smtClean="0"/>
+              <a:t>Лучше сначала схему </a:t>
+            </a:r>
+            <a:r>
+              <a:rPr lang="ru-RU" dirty="0" err="1" smtClean="0"/>
+              <a:t>ввдения</a:t>
+            </a:r>
+            <a:r>
+              <a:rPr lang="ru-RU" dirty="0" smtClean="0"/>
+              <a:t> потом накидывать на нее.</a:t>
+            </a:r>
+          </a:p>
+          <a:p>
+            <a:r>
+              <a:rPr lang="ru-RU" dirty="0" smtClean="0"/>
+              <a:t>Каждое утверждение кроме цели и вклада и значимости и </a:t>
+            </a:r>
+            <a:r>
+              <a:rPr lang="ru-RU" dirty="0" err="1" smtClean="0"/>
+              <a:t>тд</a:t>
+            </a:r>
+            <a:r>
+              <a:rPr lang="ru-RU" dirty="0" smtClean="0"/>
+              <a:t> должно </a:t>
+            </a:r>
+            <a:r>
+              <a:rPr lang="ru-RU" dirty="0" err="1" smtClean="0"/>
+              <a:t>подтверждаютсья</a:t>
+            </a:r>
+            <a:r>
+              <a:rPr lang="ru-RU" dirty="0" smtClean="0"/>
+              <a:t> ссылкой</a:t>
+            </a:r>
+          </a:p>
+          <a:p>
+            <a:r>
+              <a:rPr lang="ru-RU" dirty="0" smtClean="0"/>
+              <a:t>Чем более общее или более важное заявление тем больше ссылок оно требует</a:t>
+            </a:r>
+          </a:p>
+          <a:p>
+            <a:r>
+              <a:rPr lang="ru-RU" dirty="0" smtClean="0"/>
+              <a:t>Ссылки бывают или на классические работы, </a:t>
+            </a:r>
+            <a:r>
+              <a:rPr lang="ru-RU" dirty="0" err="1" smtClean="0"/>
+              <a:t>накоторые</a:t>
+            </a:r>
+            <a:r>
+              <a:rPr lang="ru-RU" dirty="0" smtClean="0"/>
+              <a:t> как правило уже многие ссылались или на самые свежие работы.</a:t>
+            </a:r>
+          </a:p>
+          <a:p>
+            <a:endParaRPr lang="ru-RU" dirty="0" smtClean="0"/>
+          </a:p>
+        </p:txBody>
+      </p:sp>
+    </p:spTree>
+    <p:extLst>
+      <p:ext uri="{BB962C8B-B14F-4D97-AF65-F5344CB8AC3E}">
+        <p14:creationId xmlns:p14="http://schemas.microsoft.com/office/powerpoint/2010/main" val="3907981917"/>
+      </p:ext>
+    </p:extLst>
+  </p:cSld>
+  <p:clrMapOvr>
+    <a:masterClrMapping/>
+  </p:clrMapOvr>
+  <p:timing>
+    <p:tnLst>
+      <p:par>
+        <p:cTn id="1" dur="indefinite" restart="never" nodeType="tmRoot"/>
+      </p:par>
+    </p:tnLst>
+  </p:timing>
+</p:sld>
+</file>
+
+<file path=ppt/slides/slide32.xml><?xml version="1.0" encoding="utf-8"?>
+<p:sld xmlns:a="http://schemas.openxmlformats.org/drawingml/2006/main" xmlns:r="http://schemas.openxmlformats.org/officeDocument/2006/relationships" xmlns:p="http://schemas.openxmlformats.org/presentationml/2006/main">
+  <p:cSld>
+    <p:spTree>
+      <p:nvGrpSpPr>
+        <p:cNvPr id="1" name=""/>
+        <p:cNvGrpSpPr/>
+        <p:nvPr/>
+      </p:nvGrpSpPr>
+      <p:grpSpPr>
+        <a:xfrm>
+          <a:off x="0" y="0"/>
+          <a:ext cx="0" cy="0"/>
+          <a:chOff x="0" y="0"/>
+          <a:chExt cx="0" cy="0"/>
+        </a:xfrm>
+      </p:grpSpPr>
+      <p:sp>
+        <p:nvSpPr>
+          <p:cNvPr id="2" name="Заголовок 1"/>
+          <p:cNvSpPr>
+            <a:spLocks noGrp="1"/>
+          </p:cNvSpPr>
+          <p:nvPr>
+            <p:ph type="title"/>
+          </p:nvPr>
+        </p:nvSpPr>
+        <p:spPr/>
+        <p:txBody>
+          <a:bodyPr/>
+          <a:lstStyle/>
+          <a:p>
+            <a:r>
+              <a:rPr lang="ru-RU" dirty="0" smtClean="0"/>
+              <a:t>Замечания к основной части статьи</a:t>
+            </a:r>
+            <a:endParaRPr lang="ru-RU" dirty="0"/>
+          </a:p>
+        </p:txBody>
+      </p:sp>
+      <p:sp>
+        <p:nvSpPr>
+          <p:cNvPr id="3" name="Объект 2"/>
+          <p:cNvSpPr>
+            <a:spLocks noGrp="1"/>
+          </p:cNvSpPr>
+          <p:nvPr>
+            <p:ph idx="1"/>
+          </p:nvPr>
+        </p:nvSpPr>
+        <p:spPr>
+          <a:xfrm>
+            <a:off x="731195" y="1485156"/>
+            <a:ext cx="10515600" cy="4915644"/>
+          </a:xfrm>
+        </p:spPr>
+        <p:txBody>
+          <a:bodyPr>
+            <a:normAutofit fontScale="77500" lnSpcReduction="20000"/>
+          </a:bodyPr>
+          <a:lstStyle/>
+          <a:p>
+            <a:r>
+              <a:rPr lang="ru-RU" dirty="0" smtClean="0"/>
+              <a:t>Чем проще язык тем лучше. Заявления должны быть простыми предложениями. Стиль </a:t>
+            </a:r>
+            <a:r>
+              <a:rPr lang="ru-RU" dirty="0" err="1" smtClean="0"/>
+              <a:t>схуой</a:t>
+            </a:r>
+            <a:r>
+              <a:rPr lang="ru-RU" dirty="0" smtClean="0"/>
+              <a:t> научный. Максимум цифр и </a:t>
+            </a:r>
+            <a:r>
+              <a:rPr lang="ru-RU" dirty="0" err="1" smtClean="0"/>
+              <a:t>комментанриев</a:t>
+            </a:r>
+            <a:r>
+              <a:rPr lang="ru-RU" dirty="0" smtClean="0"/>
+              <a:t> к ним, минимум эмоций.</a:t>
+            </a:r>
+          </a:p>
+          <a:p>
+            <a:r>
+              <a:rPr lang="ru-RU" dirty="0" smtClean="0"/>
+              <a:t>Максимум медиа материалов, например таблицы, графики, </a:t>
+            </a:r>
+            <a:r>
+              <a:rPr lang="ru-RU" dirty="0" err="1" smtClean="0"/>
+              <a:t>иллюстрации,алгоритмы</a:t>
+            </a:r>
+            <a:r>
+              <a:rPr lang="ru-RU" dirty="0" smtClean="0"/>
+              <a:t>. </a:t>
+            </a:r>
+          </a:p>
+          <a:p>
+            <a:r>
+              <a:rPr lang="ru-RU" dirty="0" smtClean="0"/>
+              <a:t>Каждый </a:t>
+            </a:r>
+            <a:r>
+              <a:rPr lang="ru-RU" dirty="0" err="1" smtClean="0"/>
+              <a:t>медиаматериал</a:t>
+            </a:r>
+            <a:r>
+              <a:rPr lang="ru-RU" dirty="0" smtClean="0"/>
+              <a:t> имеет цель представления и после него идет к нему комментарий.</a:t>
+            </a:r>
+          </a:p>
+          <a:p>
+            <a:r>
+              <a:rPr lang="ru-RU" dirty="0" smtClean="0"/>
+              <a:t>Все </a:t>
+            </a:r>
+            <a:r>
+              <a:rPr lang="ru-RU" dirty="0" err="1" smtClean="0"/>
+              <a:t>медиаматериалы</a:t>
+            </a:r>
+            <a:r>
+              <a:rPr lang="ru-RU" dirty="0" smtClean="0"/>
+              <a:t> направлены на доказательство конкретных утверждений доказывающих цель работы.</a:t>
+            </a:r>
+          </a:p>
+          <a:p>
+            <a:r>
+              <a:rPr lang="ru-RU" dirty="0" smtClean="0"/>
+              <a:t>Каждый подраздел начинается с цели его введения в работу (1-2 </a:t>
+            </a:r>
+            <a:r>
+              <a:rPr lang="ru-RU" dirty="0" err="1" smtClean="0"/>
+              <a:t>предлоежния</a:t>
+            </a:r>
+            <a:r>
+              <a:rPr lang="ru-RU" dirty="0" smtClean="0"/>
+              <a:t>).</a:t>
+            </a:r>
+          </a:p>
+          <a:p>
+            <a:r>
+              <a:rPr lang="ru-RU" dirty="0" smtClean="0"/>
+              <a:t>Каждый подраздел заканчивается </a:t>
+            </a:r>
+            <a:r>
+              <a:rPr lang="ru-RU" dirty="0" err="1" smtClean="0"/>
+              <a:t>минивыводом</a:t>
+            </a:r>
+            <a:r>
+              <a:rPr lang="ru-RU" dirty="0" smtClean="0"/>
+              <a:t> в 1-2 предложения.</a:t>
+            </a:r>
+          </a:p>
+          <a:p>
+            <a:r>
+              <a:rPr lang="ru-RU" dirty="0" smtClean="0"/>
+              <a:t>Если утверждение не очевидно из популярных у аудитории статьи источников, оно или объясняется или кратко объясняется + ссылка.</a:t>
+            </a:r>
+          </a:p>
+          <a:p>
+            <a:r>
+              <a:rPr lang="ru-RU" dirty="0" smtClean="0"/>
+              <a:t>Подразделы должны быть логически связаны и однородны. То есть каждый посвящен своему </a:t>
+            </a:r>
+            <a:r>
+              <a:rPr lang="ru-RU" dirty="0" err="1" smtClean="0"/>
+              <a:t>подраздельчику</a:t>
+            </a:r>
+            <a:r>
+              <a:rPr lang="ru-RU" dirty="0" smtClean="0"/>
+              <a:t>.</a:t>
+            </a:r>
+          </a:p>
+          <a:p>
+            <a:r>
+              <a:rPr lang="ru-RU" dirty="0"/>
+              <a:t>вместо местоимений даем ссылки на обсуждаемый предмет</a:t>
+            </a:r>
+            <a:r>
+              <a:rPr lang="ru-RU" dirty="0" smtClean="0"/>
+              <a:t>.</a:t>
+            </a:r>
+            <a:br>
+              <a:rPr lang="ru-RU" dirty="0" smtClean="0"/>
+            </a:br>
+            <a:endParaRPr lang="ru-RU" dirty="0"/>
+          </a:p>
+        </p:txBody>
+      </p:sp>
+    </p:spTree>
+    <p:extLst>
+      <p:ext uri="{BB962C8B-B14F-4D97-AF65-F5344CB8AC3E}">
+        <p14:creationId xmlns:p14="http://schemas.microsoft.com/office/powerpoint/2010/main" val="591023250"/>
+      </p:ext>
+    </p:extLst>
+  </p:cSld>
+  <p:clrMapOvr>
+    <a:masterClrMapping/>
+  </p:clrMapOvr>
+  <p:timing>
+    <p:tnLst>
+      <p:par>
+        <p:cTn id="1" dur="indefinite" restart="never" nodeType="tmRoot"/>
+      </p:par>
+    </p:tnLst>
+  </p:timing>
+</p:sld>
+</file>
+
+<file path=ppt/slides/slide33.xml><?xml version="1.0" encoding="utf-8"?>
+<p:sld xmlns:a="http://schemas.openxmlformats.org/drawingml/2006/main" xmlns:r="http://schemas.openxmlformats.org/officeDocument/2006/relationships" xmlns:p="http://schemas.openxmlformats.org/presentationml/2006/main">
+  <p:cSld>
+    <p:spTree>
+      <p:nvGrpSpPr>
+        <p:cNvPr id="1" name=""/>
+        <p:cNvGrpSpPr/>
+        <p:nvPr/>
+      </p:nvGrpSpPr>
+      <p:grpSpPr>
+        <a:xfrm>
+          <a:off x="0" y="0"/>
+          <a:ext cx="0" cy="0"/>
+          <a:chOff x="0" y="0"/>
+          <a:chExt cx="0" cy="0"/>
+        </a:xfrm>
+      </p:grpSpPr>
+      <p:sp>
+        <p:nvSpPr>
+          <p:cNvPr id="2" name="Заголовок 1"/>
+          <p:cNvSpPr>
+            <a:spLocks noGrp="1"/>
+          </p:cNvSpPr>
+          <p:nvPr>
+            <p:ph type="title"/>
+          </p:nvPr>
+        </p:nvSpPr>
         <p:spPr>
           <a:xfrm>
             <a:off x="381000" y="365125"/>
@@ -5639,6 +6214,9 @@
               <a:rPr lang="ru-RU" dirty="0" err="1" smtClean="0"/>
               <a:t>насмотренность</a:t>
             </a:r>
+            <a:endParaRPr lang="ru-RU" dirty="0" smtClean="0"/>
+          </a:p>
+          <a:p>
             <a:endParaRPr lang="ru-RU" dirty="0"/>
           </a:p>
         </p:txBody>
@@ -5647,6 +6225,616 @@
     <p:extLst>
       <p:ext uri="{BB962C8B-B14F-4D97-AF65-F5344CB8AC3E}">
         <p14:creationId xmlns:p14="http://schemas.microsoft.com/office/powerpoint/2010/main" val="1427291924"/>
+      </p:ext>
+    </p:extLst>
+  </p:cSld>
+  <p:clrMapOvr>
+    <a:masterClrMapping/>
+  </p:clrMapOvr>
+  <p:timing>
+    <p:tnLst>
+      <p:par>
+        <p:cTn id="1" dur="indefinite" restart="never" nodeType="tmRoot"/>
+      </p:par>
+    </p:tnLst>
+  </p:timing>
+</p:sld>
+</file>
+
+<file path=ppt/slides/slide34.xml><?xml version="1.0" encoding="utf-8"?>
+<p:sld xmlns:a="http://schemas.openxmlformats.org/drawingml/2006/main" xmlns:r="http://schemas.openxmlformats.org/officeDocument/2006/relationships" xmlns:p="http://schemas.openxmlformats.org/presentationml/2006/main">
+  <p:cSld>
+    <p:spTree>
+      <p:nvGrpSpPr>
+        <p:cNvPr id="1" name=""/>
+        <p:cNvGrpSpPr/>
+        <p:nvPr/>
+      </p:nvGrpSpPr>
+      <p:grpSpPr>
+        <a:xfrm>
+          <a:off x="0" y="0"/>
+          <a:ext cx="0" cy="0"/>
+          <a:chOff x="0" y="0"/>
+          <a:chExt cx="0" cy="0"/>
+        </a:xfrm>
+      </p:grpSpPr>
+      <p:sp>
+        <p:nvSpPr>
+          <p:cNvPr id="2" name="Заголовок 1"/>
+          <p:cNvSpPr>
+            <a:spLocks noGrp="1"/>
+          </p:cNvSpPr>
+          <p:nvPr>
+            <p:ph type="title"/>
+          </p:nvPr>
+        </p:nvSpPr>
+        <p:spPr/>
+        <p:txBody>
+          <a:bodyPr/>
+          <a:lstStyle/>
+          <a:p>
+            <a:endParaRPr lang="ru-RU"/>
+          </a:p>
+        </p:txBody>
+      </p:sp>
+      <p:sp>
+        <p:nvSpPr>
+          <p:cNvPr id="4" name="Rectangle 1"/>
+          <p:cNvSpPr>
+            <a:spLocks noGrp="1" noChangeArrowheads="1"/>
+          </p:cNvSpPr>
+          <p:nvPr>
+            <p:ph idx="1"/>
+          </p:nvPr>
+        </p:nvSpPr>
+        <p:spPr bwMode="auto">
+          <a:prstGeom prst="rect">
+            <a:avLst/>
+          </a:prstGeom>
+          <a:noFill/>
+          <a:ln>
+            <a:noFill/>
+          </a:ln>
+          <a:effectLst/>
+          <a:extLst>
+            <a:ext uri="{909E8E84-426E-40DD-AFC4-6F175D3DCCD1}">
+              <a14:hiddenFill xmlns:a14="http://schemas.microsoft.com/office/drawing/2010/main">
+                <a:solidFill>
+                  <a:schemeClr val="accent1"/>
+                </a:solidFill>
+              </a14:hiddenFill>
+            </a:ext>
+            <a:ext uri="{91240B29-F687-4F45-9708-019B960494DF}">
+              <a14:hiddenLine xmlns:a14="http://schemas.microsoft.com/office/drawing/2010/main" w="9525">
+                <a:solidFill>
+                  <a:schemeClr val="tx1"/>
+                </a:solidFill>
+                <a:miter lim="800000"/>
+                <a:headEnd/>
+                <a:tailEnd/>
+              </a14:hiddenLine>
+            </a:ext>
+            <a:ext uri="{AF507438-7753-43E0-B8FC-AC1667EBCBE1}">
+              <a14:hiddenEffects xmlns:a14="http://schemas.microsoft.com/office/drawing/2010/main">
+                <a:effectLst>
+                  <a:outerShdw dist="35921" dir="2700000" algn="ctr" rotWithShape="0">
+                    <a:schemeClr val="bg2"/>
+                  </a:outerShdw>
+                </a:effectLst>
+              </a14:hiddenEffects>
+            </a:ext>
+          </a:extLst>
+        </p:spPr>
+        <p:txBody>
+          <a:bodyPr vert="horz" wrap="none" lIns="91440" tIns="45720" rIns="91440" bIns="45720" numCol="1" anchor="ctr" anchorCtr="0" compatLnSpc="1">
+            <a:prstTxWarp prst="textNoShape">
+              <a:avLst/>
+            </a:prstTxWarp>
+            <a:spAutoFit/>
+          </a:bodyPr>
+          <a:lstStyle/>
+          <a:p>
+            <a:pPr marL="0" marR="0" lvl="0" indent="0" algn="l" defTabSz="914400" rtl="0" eaLnBrk="0" fontAlgn="base" latinLnBrk="0" hangingPunct="0">
+              <a:lnSpc>
+                <a:spcPct val="100000"/>
+              </a:lnSpc>
+              <a:spcBef>
+                <a:spcPct val="0"/>
+              </a:spcBef>
+              <a:spcAft>
+                <a:spcPct val="0"/>
+              </a:spcAft>
+              <a:buClrTx/>
+              <a:buSzTx/>
+              <a:buFontTx/>
+              <a:buNone/>
+              <a:tabLst/>
+            </a:pPr>
+            <a:r>
+              <a:rPr kumimoji="0" lang="ru-RU" altLang="ru-RU" sz="1800" b="0" i="0" u="none" strike="noStrike" cap="none" normalizeH="0" baseline="0" smtClean="0">
+                <a:ln>
+                  <a:noFill/>
+                </a:ln>
+                <a:solidFill>
+                  <a:schemeClr val="tx1"/>
+                </a:solidFill>
+                <a:effectLst/>
+                <a:latin typeface="Arial" panose="020B0604020202020204" pitchFamily="34" charset="0"/>
+              </a:rPr>
+              <a:t>Дополнительно просить их каждый раз не нужно — применяем далее:</a:t>
+            </a:r>
+          </a:p>
+          <a:p>
+            <a:pPr marL="0" marR="0" lvl="0" indent="0" algn="l" defTabSz="914400" rtl="0" eaLnBrk="0" fontAlgn="base" latinLnBrk="0" hangingPunct="0">
+              <a:lnSpc>
+                <a:spcPct val="100000"/>
+              </a:lnSpc>
+              <a:spcBef>
+                <a:spcPct val="0"/>
+              </a:spcBef>
+              <a:spcAft>
+                <a:spcPct val="0"/>
+              </a:spcAft>
+              <a:buClrTx/>
+              <a:buSzTx/>
+              <a:buFontTx/>
+              <a:buAutoNum type="arabicPeriod"/>
+              <a:tabLst/>
+            </a:pPr>
+            <a:r>
+              <a:rPr kumimoji="0" lang="ru-RU" altLang="ru-RU" sz="1800" b="1" i="0" u="none" strike="noStrike" cap="none" normalizeH="0" baseline="0" smtClean="0">
+                <a:ln>
+                  <a:noFill/>
+                </a:ln>
+                <a:solidFill>
+                  <a:schemeClr val="tx1"/>
+                </a:solidFill>
+                <a:effectLst/>
+                <a:latin typeface="Arial" panose="020B0604020202020204" pitchFamily="34" charset="0"/>
+              </a:rPr>
+              <a:t>Простой академический английский.</a:t>
+            </a:r>
+            <a:r>
+              <a:rPr kumimoji="0" lang="ru-RU" altLang="ru-RU" sz="1800" b="0" i="0" u="none" strike="noStrike" cap="none" normalizeH="0" baseline="0" smtClean="0">
+                <a:ln>
+                  <a:noFill/>
+                </a:ln>
+                <a:solidFill>
+                  <a:schemeClr val="tx1"/>
+                </a:solidFill>
+                <a:effectLst/>
+                <a:latin typeface="Arial" panose="020B0604020202020204" pitchFamily="34" charset="0"/>
+              </a:rPr>
+              <a:t> Конкретный предмет, действие и результат. Без разговорных оборотов, риторических вопросов и оценочных фраз вроде </a:t>
+            </a:r>
+            <a:r>
+              <a:rPr kumimoji="0" lang="ru-RU" altLang="ru-RU" sz="1000" b="0" i="0" u="none" strike="noStrike" cap="none" normalizeH="0" baseline="0" smtClean="0">
+                <a:ln>
+                  <a:noFill/>
+                </a:ln>
+                <a:solidFill>
+                  <a:schemeClr val="tx1"/>
+                </a:solidFill>
+                <a:effectLst/>
+                <a:latin typeface="Arial Unicode MS"/>
+              </a:rPr>
+              <a:t>what the detector sees</a:t>
+            </a:r>
+            <a:r>
+              <a:rPr kumimoji="0" lang="ru-RU" altLang="ru-RU" sz="400" b="0" i="0" u="none" strike="noStrike" cap="none" normalizeH="0" baseline="0" smtClean="0">
+                <a:ln>
+                  <a:noFill/>
+                </a:ln>
+                <a:solidFill>
+                  <a:schemeClr val="tx1"/>
+                </a:solidFill>
+                <a:effectLst/>
+              </a:rPr>
+              <a:t>, </a:t>
+            </a:r>
+            <a:r>
+              <a:rPr kumimoji="0" lang="ru-RU" altLang="ru-RU" sz="1000" b="0" i="0" u="none" strike="noStrike" cap="none" normalizeH="0" baseline="0" smtClean="0">
+                <a:ln>
+                  <a:noFill/>
+                </a:ln>
+                <a:solidFill>
+                  <a:schemeClr val="tx1"/>
+                </a:solidFill>
+                <a:effectLst/>
+                <a:latin typeface="Arial Unicode MS"/>
+              </a:rPr>
+              <a:t>the enabling property</a:t>
+            </a:r>
+            <a:r>
+              <a:rPr kumimoji="0" lang="ru-RU" altLang="ru-RU" sz="400" b="0" i="0" u="none" strike="noStrike" cap="none" normalizeH="0" baseline="0" smtClean="0">
+                <a:ln>
+                  <a:noFill/>
+                </a:ln>
+                <a:solidFill>
+                  <a:schemeClr val="tx1"/>
+                </a:solidFill>
+                <a:effectLst/>
+              </a:rPr>
+              <a:t>, </a:t>
+            </a:r>
+            <a:r>
+              <a:rPr kumimoji="0" lang="ru-RU" altLang="ru-RU" sz="1000" b="0" i="0" u="none" strike="noStrike" cap="none" normalizeH="0" baseline="0" smtClean="0">
+                <a:ln>
+                  <a:noFill/>
+                </a:ln>
+                <a:solidFill>
+                  <a:schemeClr val="tx1"/>
+                </a:solidFill>
+                <a:effectLst/>
+                <a:latin typeface="Arial Unicode MS"/>
+              </a:rPr>
+              <a:t>documented rather than merely published</a:t>
+            </a:r>
+            <a:r>
+              <a:rPr kumimoji="0" lang="ru-RU" altLang="ru-RU" sz="400" b="0" i="0" u="none" strike="noStrike" cap="none" normalizeH="0" baseline="0" smtClean="0">
+                <a:ln>
+                  <a:noFill/>
+                </a:ln>
+                <a:solidFill>
+                  <a:schemeClr val="tx1"/>
+                </a:solidFill>
+                <a:effectLst/>
+              </a:rPr>
+              <a:t>. </a:t>
+            </a:r>
+            <a:endParaRPr kumimoji="0" lang="ru-RU" altLang="ru-RU" sz="1800" b="0" i="0" u="none" strike="noStrike" cap="none" normalizeH="0" baseline="0" smtClean="0">
+              <a:ln>
+                <a:noFill/>
+              </a:ln>
+              <a:solidFill>
+                <a:schemeClr val="tx1"/>
+              </a:solidFill>
+              <a:effectLst/>
+              <a:latin typeface="Arial" panose="020B0604020202020204" pitchFamily="34" charset="0"/>
+            </a:endParaRPr>
+          </a:p>
+          <a:p>
+            <a:pPr marL="0" marR="0" lvl="0" indent="0" algn="l" defTabSz="914400" rtl="0" eaLnBrk="0" fontAlgn="base" latinLnBrk="0" hangingPunct="0">
+              <a:lnSpc>
+                <a:spcPct val="100000"/>
+              </a:lnSpc>
+              <a:spcBef>
+                <a:spcPct val="0"/>
+              </a:spcBef>
+              <a:spcAft>
+                <a:spcPct val="0"/>
+              </a:spcAft>
+              <a:buClrTx/>
+              <a:buSzTx/>
+              <a:buFontTx/>
+              <a:buAutoNum type="arabicPeriod" startAt="2"/>
+              <a:tabLst/>
+            </a:pPr>
+            <a:r>
+              <a:rPr kumimoji="0" lang="ru-RU" altLang="ru-RU" sz="1800" b="1" i="0" u="none" strike="noStrike" cap="none" normalizeH="0" baseline="0" smtClean="0">
+                <a:ln>
+                  <a:noFill/>
+                </a:ln>
+                <a:solidFill>
+                  <a:schemeClr val="tx1"/>
+                </a:solidFill>
+                <a:effectLst/>
+                <a:latin typeface="Arial" panose="020B0604020202020204" pitchFamily="34" charset="0"/>
+              </a:rPr>
+              <a:t>Сохранение научного содержания.</a:t>
+            </a:r>
+            <a:r>
+              <a:rPr kumimoji="0" lang="ru-RU" altLang="ru-RU" sz="1800" b="0" i="0" u="none" strike="noStrike" cap="none" normalizeH="0" baseline="0" smtClean="0">
+                <a:ln>
+                  <a:noFill/>
+                </a:ln>
+                <a:solidFill>
+                  <a:schemeClr val="tx1"/>
+                </a:solidFill>
+                <a:effectLst/>
+                <a:latin typeface="Arial" panose="020B0604020202020204" pitchFamily="34" charset="0"/>
+              </a:rPr>
+              <a:t> Сокращаем повторы и черновые пояснения, сохраняя существенные условия, экспериментальные детали и авторскую аргументацию. </a:t>
+            </a:r>
+          </a:p>
+          <a:p>
+            <a:pPr marL="0" marR="0" lvl="0" indent="0" algn="l" defTabSz="914400" rtl="0" eaLnBrk="0" fontAlgn="base" latinLnBrk="0" hangingPunct="0">
+              <a:lnSpc>
+                <a:spcPct val="100000"/>
+              </a:lnSpc>
+              <a:spcBef>
+                <a:spcPct val="0"/>
+              </a:spcBef>
+              <a:spcAft>
+                <a:spcPct val="0"/>
+              </a:spcAft>
+              <a:buClrTx/>
+              <a:buSzTx/>
+              <a:buFontTx/>
+              <a:buAutoNum type="arabicPeriod" startAt="3"/>
+              <a:tabLst/>
+            </a:pPr>
+            <a:r>
+              <a:rPr kumimoji="0" lang="ru-RU" altLang="ru-RU" sz="1800" b="1" i="0" u="none" strike="noStrike" cap="none" normalizeH="0" baseline="0" smtClean="0">
+                <a:ln>
+                  <a:noFill/>
+                </a:ln>
+                <a:solidFill>
+                  <a:schemeClr val="tx1"/>
+                </a:solidFill>
+                <a:effectLst/>
+                <a:latin typeface="Arial" panose="020B0604020202020204" pitchFamily="34" charset="0"/>
+              </a:rPr>
+              <a:t>Единая терминология.</a:t>
+            </a:r>
+            <a:r>
+              <a:rPr kumimoji="0" lang="ru-RU" altLang="ru-RU" sz="1800" b="0" i="0" u="none" strike="noStrike" cap="none" normalizeH="0" baseline="0" smtClean="0">
+                <a:ln>
+                  <a:noFill/>
+                </a:ln>
+                <a:solidFill>
+                  <a:schemeClr val="tx1"/>
+                </a:solidFill>
+                <a:effectLst/>
+                <a:latin typeface="Arial" panose="020B0604020202020204" pitchFamily="34" charset="0"/>
+              </a:rPr>
+              <a:t> Одно понятие — один основной термин. Различаем неисправность, условия эксплуатации, степень неисправности и метку данных. </a:t>
+            </a:r>
+          </a:p>
+          <a:p>
+            <a:pPr marL="0" marR="0" lvl="0" indent="0" algn="l" defTabSz="914400" rtl="0" eaLnBrk="0" fontAlgn="base" latinLnBrk="0" hangingPunct="0">
+              <a:lnSpc>
+                <a:spcPct val="100000"/>
+              </a:lnSpc>
+              <a:spcBef>
+                <a:spcPct val="0"/>
+              </a:spcBef>
+              <a:spcAft>
+                <a:spcPct val="0"/>
+              </a:spcAft>
+              <a:buClrTx/>
+              <a:buSzTx/>
+              <a:buFontTx/>
+              <a:buAutoNum type="arabicPeriod" startAt="4"/>
+              <a:tabLst/>
+            </a:pPr>
+            <a:r>
+              <a:rPr kumimoji="0" lang="ru-RU" altLang="ru-RU" sz="1800" b="1" i="0" u="none" strike="noStrike" cap="none" normalizeH="0" baseline="0" smtClean="0">
+                <a:ln>
+                  <a:noFill/>
+                </a:ln>
+                <a:solidFill>
+                  <a:schemeClr val="tx1"/>
+                </a:solidFill>
+                <a:effectLst/>
+                <a:latin typeface="Arial" panose="020B0604020202020204" pitchFamily="34" charset="0"/>
+              </a:rPr>
+              <a:t>Соответствие утверждений данным.</a:t>
+            </a:r>
+            <a:r>
+              <a:rPr kumimoji="0" lang="ru-RU" altLang="ru-RU" sz="1800" b="0" i="0" u="none" strike="noStrike" cap="none" normalizeH="0" baseline="0" smtClean="0">
+                <a:ln>
+                  <a:noFill/>
+                </a:ln>
+                <a:solidFill>
+                  <a:schemeClr val="tx1"/>
+                </a:solidFill>
+                <a:effectLst/>
+                <a:latin typeface="Arial" panose="020B0604020202020204" pitchFamily="34" charset="0"/>
+              </a:rPr>
+              <a:t> Измеренное значение, восстановленное значение и экспертная аннотация явно различаются. Неизвестные детали не дописываем. </a:t>
+            </a:r>
+          </a:p>
+          <a:p>
+            <a:pPr marL="0" marR="0" lvl="0" indent="0" algn="l" defTabSz="914400" rtl="0" eaLnBrk="0" fontAlgn="base" latinLnBrk="0" hangingPunct="0">
+              <a:lnSpc>
+                <a:spcPct val="100000"/>
+              </a:lnSpc>
+              <a:spcBef>
+                <a:spcPct val="0"/>
+              </a:spcBef>
+              <a:spcAft>
+                <a:spcPct val="0"/>
+              </a:spcAft>
+              <a:buClrTx/>
+              <a:buSzTx/>
+              <a:buFontTx/>
+              <a:buAutoNum type="arabicPeriod" startAt="5"/>
+              <a:tabLst/>
+            </a:pPr>
+            <a:r>
+              <a:rPr kumimoji="0" lang="ru-RU" altLang="ru-RU" sz="1800" b="1" i="0" u="none" strike="noStrike" cap="none" normalizeH="0" baseline="0" smtClean="0">
+                <a:ln>
+                  <a:noFill/>
+                </a:ln>
+                <a:solidFill>
+                  <a:schemeClr val="tx1"/>
+                </a:solidFill>
+                <a:effectLst/>
+                <a:latin typeface="Arial" panose="020B0604020202020204" pitchFamily="34" charset="0"/>
+              </a:rPr>
+              <a:t>Назначение каждого раздела.</a:t>
+            </a:r>
+            <a:r>
+              <a:rPr kumimoji="0" lang="ru-RU" altLang="ru-RU" sz="1800" b="0" i="0" u="none" strike="noStrike" cap="none" normalizeH="0" baseline="0" smtClean="0">
+                <a:ln>
+                  <a:noFill/>
+                </a:ln>
+                <a:solidFill>
+                  <a:schemeClr val="tx1"/>
+                </a:solidFill>
+                <a:effectLst/>
+                <a:latin typeface="Arial" panose="020B0604020202020204" pitchFamily="34" charset="0"/>
+              </a:rPr>
+              <a:t> Методика описывает получение данных; результаты — наблюдения; обсуждение — их объяснение и ограничения. Повторять одну мысль во всех разделах не требуется. </a:t>
+            </a:r>
+          </a:p>
+          <a:p>
+            <a:pPr marL="0" marR="0" lvl="0" indent="0" algn="l" defTabSz="914400" rtl="0" eaLnBrk="0" fontAlgn="base" latinLnBrk="0" hangingPunct="0">
+              <a:lnSpc>
+                <a:spcPct val="100000"/>
+              </a:lnSpc>
+              <a:spcBef>
+                <a:spcPct val="0"/>
+              </a:spcBef>
+              <a:spcAft>
+                <a:spcPct val="0"/>
+              </a:spcAft>
+              <a:buClrTx/>
+              <a:buSzTx/>
+              <a:buFontTx/>
+              <a:buAutoNum type="arabicPeriod" startAt="6"/>
+              <a:tabLst/>
+            </a:pPr>
+            <a:r>
+              <a:rPr kumimoji="0" lang="ru-RU" altLang="ru-RU" sz="1800" b="1" i="0" u="none" strike="noStrike" cap="none" normalizeH="0" baseline="0" smtClean="0">
+                <a:ln>
+                  <a:noFill/>
+                </a:ln>
+                <a:solidFill>
+                  <a:schemeClr val="tx1"/>
+                </a:solidFill>
+                <a:effectLst/>
+                <a:latin typeface="Arial" panose="020B0604020202020204" pitchFamily="34" charset="0"/>
+              </a:rPr>
+              <a:t>Проверяемость численных выводов.</a:t>
+            </a:r>
+            <a:r>
+              <a:rPr kumimoji="0" lang="ru-RU" altLang="ru-RU" sz="1800" b="0" i="0" u="none" strike="noStrike" cap="none" normalizeH="0" baseline="0" smtClean="0">
+                <a:ln>
+                  <a:noFill/>
+                </a:ln>
+                <a:solidFill>
+                  <a:schemeClr val="tx1"/>
+                </a:solidFill>
+                <a:effectLst/>
+                <a:latin typeface="Arial" panose="020B0604020202020204" pitchFamily="34" charset="0"/>
+              </a:rPr>
+              <a:t> У каждого основного количественного утверждения должен быть источник в таблице, рисунке или расчёте. При отсутствии приложенной таблицы не считаем её проверенной. </a:t>
+            </a:r>
+          </a:p>
+          <a:p>
+            <a:pPr marL="0" marR="0" lvl="0" indent="0" algn="l" defTabSz="914400" rtl="0" eaLnBrk="0" fontAlgn="base" latinLnBrk="0" hangingPunct="0">
+              <a:lnSpc>
+                <a:spcPct val="100000"/>
+              </a:lnSpc>
+              <a:spcBef>
+                <a:spcPct val="0"/>
+              </a:spcBef>
+              <a:spcAft>
+                <a:spcPct val="0"/>
+              </a:spcAft>
+              <a:buClrTx/>
+              <a:buSzTx/>
+              <a:buFontTx/>
+              <a:buAutoNum type="arabicPeriod" startAt="7"/>
+              <a:tabLst/>
+            </a:pPr>
+            <a:r>
+              <a:rPr kumimoji="0" lang="ru-RU" altLang="ru-RU" sz="1800" b="1" i="0" u="none" strike="noStrike" cap="none" normalizeH="0" baseline="0" smtClean="0">
+                <a:ln>
+                  <a:noFill/>
+                </a:ln>
+                <a:solidFill>
+                  <a:schemeClr val="tx1"/>
+                </a:solidFill>
+                <a:effectLst/>
+                <a:latin typeface="Arial" panose="020B0604020202020204" pitchFamily="34" charset="0"/>
+              </a:rPr>
+              <a:t>Окончательность редакции.</a:t>
+            </a:r>
+            <a:r>
+              <a:rPr kumimoji="0" lang="ru-RU" altLang="ru-RU" sz="1800" b="0" i="0" u="none" strike="noStrike" cap="none" normalizeH="0" baseline="0" smtClean="0">
+                <a:ln>
+                  <a:noFill/>
+                </a:ln>
+                <a:solidFill>
+                  <a:schemeClr val="tx1"/>
+                </a:solidFill>
+                <a:effectLst/>
+                <a:latin typeface="Arial" panose="020B0604020202020204" pitchFamily="34" charset="0"/>
+              </a:rPr>
+              <a:t> Один готовый вариант каждого фрагмента. После согласования возвращаемся к нему только при конкретной ошибке или новых данных. </a:t>
+            </a:r>
+          </a:p>
+          <a:p>
+            <a:pPr marL="0" marR="0" lvl="0" indent="0" algn="l" defTabSz="914400" rtl="0" eaLnBrk="0" fontAlgn="base" latinLnBrk="0" hangingPunct="0">
+              <a:lnSpc>
+                <a:spcPct val="100000"/>
+              </a:lnSpc>
+              <a:spcBef>
+                <a:spcPct val="0"/>
+              </a:spcBef>
+              <a:spcAft>
+                <a:spcPct val="0"/>
+              </a:spcAft>
+              <a:buClrTx/>
+              <a:buSzTx/>
+              <a:buFontTx/>
+              <a:buAutoNum type="arabicPeriod" startAt="8"/>
+              <a:tabLst/>
+            </a:pPr>
+            <a:r>
+              <a:rPr kumimoji="0" lang="ru-RU" altLang="ru-RU" sz="1800" b="1" i="0" u="none" strike="noStrike" cap="none" normalizeH="0" baseline="0" smtClean="0">
+                <a:ln>
+                  <a:noFill/>
+                </a:ln>
+                <a:solidFill>
+                  <a:schemeClr val="tx1"/>
+                </a:solidFill>
+                <a:effectLst/>
+                <a:latin typeface="Arial" panose="020B0604020202020204" pitchFamily="34" charset="0"/>
+              </a:rPr>
+              <a:t>Формат работы:</a:t>
+            </a:r>
+            <a:r>
+              <a:rPr kumimoji="0" lang="ru-RU" altLang="ru-RU" sz="1800" b="0" i="0" u="none" strike="noStrike" cap="none" normalizeH="0" baseline="0" smtClean="0">
+                <a:ln>
+                  <a:noFill/>
+                </a:ln>
+                <a:solidFill>
+                  <a:schemeClr val="tx1"/>
+                </a:solidFill>
+                <a:effectLst/>
+                <a:latin typeface="Arial" panose="020B0604020202020204" pitchFamily="34" charset="0"/>
+              </a:rPr>
+              <a:t> точное место, «Было», готовое «Стало», краткая «Причина». Переносы указываем отдельно. Аннотацию и заключение окончательно согласуем после основного текста.</a:t>
+            </a:r>
+          </a:p>
+          <a:p>
+            <a:pPr marL="0" marR="0" lvl="0" indent="0" algn="l" defTabSz="914400" rtl="0" eaLnBrk="0" fontAlgn="base" latinLnBrk="0" hangingPunct="0">
+              <a:lnSpc>
+                <a:spcPct val="100000"/>
+              </a:lnSpc>
+              <a:spcBef>
+                <a:spcPct val="0"/>
+              </a:spcBef>
+              <a:spcAft>
+                <a:spcPct val="0"/>
+              </a:spcAft>
+              <a:buClrTx/>
+              <a:buSzTx/>
+              <a:buFontTx/>
+              <a:buNone/>
+              <a:tabLst/>
+            </a:pPr>
+            <a:endParaRPr kumimoji="0" lang="ru-RU" altLang="ru-RU" sz="1800" b="0" i="0" u="none" strike="noStrike" cap="none" normalizeH="0" baseline="0" smtClean="0">
+              <a:ln>
+                <a:noFill/>
+              </a:ln>
+              <a:solidFill>
+                <a:schemeClr val="tx1"/>
+              </a:solidFill>
+              <a:effectLst/>
+              <a:latin typeface="Arial" panose="020B0604020202020204" pitchFamily="34" charset="0"/>
+            </a:endParaRPr>
+          </a:p>
+        </p:txBody>
+      </p:sp>
+    </p:spTree>
+    <p:extLst>
+      <p:ext uri="{BB962C8B-B14F-4D97-AF65-F5344CB8AC3E}">
+        <p14:creationId xmlns:p14="http://schemas.microsoft.com/office/powerpoint/2010/main" val="1543334129"/>
       </p:ext>
     </p:extLst>
   </p:cSld>
@@ -5821,6 +7009,22 @@
           </a:bodyPr>
           <a:lstStyle/>
           <a:p>
+            <a:r>
+              <a:rPr lang="ru-RU" dirty="0" err="1" smtClean="0"/>
+              <a:t>Мульити</a:t>
+            </a:r>
+            <a:r>
+              <a:rPr lang="ru-RU" dirty="0" smtClean="0"/>
+              <a:t> </a:t>
+            </a:r>
+            <a:r>
+              <a:rPr lang="ru-RU" dirty="0" err="1" smtClean="0"/>
+              <a:t>агентные</a:t>
+            </a:r>
+            <a:r>
+              <a:rPr lang="ru-RU" dirty="0" smtClean="0"/>
+              <a:t>, ансамбли , …</a:t>
+            </a:r>
             <a:endParaRPr lang="ru-RU" dirty="0"/>
           </a:p>
         </p:txBody>
